--- a/PPT/JPOPBatch10--Circuit Breaker & Flyway Patterns.pptx
+++ b/PPT/JPOPBatch10--Circuit Breaker & Flyway Patterns.pptx
@@ -6,23 +6,24 @@
     <p:sldMasterId id="2147483668" r:id="rId2"/>
   </p:sldMasterIdLst>
   <p:notesMasterIdLst>
-    <p:notesMasterId r:id="rId17"/>
+    <p:notesMasterId r:id="rId18"/>
   </p:notesMasterIdLst>
   <p:sldIdLst>
     <p:sldId id="256" r:id="rId3"/>
     <p:sldId id="329" r:id="rId4"/>
     <p:sldId id="352" r:id="rId5"/>
-    <p:sldId id="354" r:id="rId6"/>
-    <p:sldId id="353" r:id="rId7"/>
-    <p:sldId id="355" r:id="rId8"/>
-    <p:sldId id="356" r:id="rId9"/>
-    <p:sldId id="357" r:id="rId10"/>
-    <p:sldId id="362" r:id="rId11"/>
-    <p:sldId id="363" r:id="rId12"/>
-    <p:sldId id="366" r:id="rId13"/>
-    <p:sldId id="365" r:id="rId14"/>
-    <p:sldId id="367" r:id="rId15"/>
-    <p:sldId id="346" r:id="rId16"/>
+    <p:sldId id="368" r:id="rId6"/>
+    <p:sldId id="354" r:id="rId7"/>
+    <p:sldId id="353" r:id="rId8"/>
+    <p:sldId id="355" r:id="rId9"/>
+    <p:sldId id="356" r:id="rId10"/>
+    <p:sldId id="357" r:id="rId11"/>
+    <p:sldId id="362" r:id="rId12"/>
+    <p:sldId id="363" r:id="rId13"/>
+    <p:sldId id="366" r:id="rId14"/>
+    <p:sldId id="365" r:id="rId15"/>
+    <p:sldId id="367" r:id="rId16"/>
+    <p:sldId id="346" r:id="rId17"/>
   </p:sldIdLst>
   <p:sldSz cx="9144000" cy="5143500" type="screen16x9"/>
   <p:notesSz cx="6858000" cy="9144000"/>
@@ -16902,7 +16903,7 @@
                   <a:schemeClr val="bg2"/>
                 </a:solidFill>
               </a:rPr>
-              <a:t>Resilience4j Circuit Breaker &amp; Flyway Patterns</a:t>
+              <a:t>Resilience Patterns &amp; Flyway Tool</a:t>
             </a:r>
             <a:endParaRPr sz="4000" dirty="0">
               <a:solidFill>
@@ -17456,7 +17457,7 @@
           <a:p>
             <a:r>
               <a:rPr lang="en-US" dirty="0"/>
-              <a:t>Resilience4j Rate Limiter</a:t>
+              <a:t>Resilience4j Retry</a:t>
             </a:r>
           </a:p>
         </p:txBody>
@@ -17493,12 +17494,42 @@
           </a:p>
         </p:txBody>
       </p:sp>
+      <p:pic>
+        <p:nvPicPr>
+          <p:cNvPr id="6" name="Picture 5" descr="Diagram&#10;&#10;Description automatically generated">
+            <a:extLst>
+              <a:ext uri="{FF2B5EF4-FFF2-40B4-BE49-F238E27FC236}">
+                <a16:creationId xmlns:a16="http://schemas.microsoft.com/office/drawing/2014/main" id="{C80B5CC3-CFE0-46BE-8DF4-7F6BA49CADA5}"/>
+              </a:ext>
+            </a:extLst>
+          </p:cNvPr>
+          <p:cNvPicPr>
+            <a:picLocks noChangeAspect="1"/>
+          </p:cNvPicPr>
+          <p:nvPr/>
+        </p:nvPicPr>
+        <p:blipFill>
+          <a:blip r:embed="rId2"/>
+          <a:stretch>
+            <a:fillRect/>
+          </a:stretch>
+        </p:blipFill>
+        <p:spPr>
+          <a:xfrm>
+            <a:off x="614723" y="1081470"/>
+            <a:ext cx="5405838" cy="3194050"/>
+          </a:xfrm>
+          <a:prstGeom prst="rect">
+            <a:avLst/>
+          </a:prstGeom>
+        </p:spPr>
+      </p:pic>
       <p:sp>
         <p:nvSpPr>
           <p:cNvPr id="4" name="TextBox 3">
             <a:extLst>
               <a:ext uri="{FF2B5EF4-FFF2-40B4-BE49-F238E27FC236}">
-                <a16:creationId xmlns:a16="http://schemas.microsoft.com/office/drawing/2014/main" id="{A59FBE4C-C91E-4622-88D3-A7A47769C790}"/>
+                <a16:creationId xmlns:a16="http://schemas.microsoft.com/office/drawing/2014/main" id="{17E8954E-A1DB-47DE-9CB5-919890DCBA3F}"/>
               </a:ext>
             </a:extLst>
           </p:cNvPr>
@@ -17507,8 +17538,8 @@
         </p:nvSpPr>
         <p:spPr>
           <a:xfrm>
-            <a:off x="497283" y="949966"/>
-            <a:ext cx="4197662" cy="4231928"/>
+            <a:off x="6439220" y="1467650"/>
+            <a:ext cx="2574151" cy="2246769"/>
           </a:xfrm>
           <a:prstGeom prst="rect">
             <a:avLst/>
@@ -17521,165 +17552,11 @@
           </a:bodyPr>
           <a:lstStyle/>
           <a:p>
-            <a:pPr marL="285750" indent="-285750">
-              <a:buFontTx/>
-              <a:buChar char="-"/>
-            </a:pPr>
-            <a:r>
-              <a:rPr lang="en-US" dirty="0"/>
-              <a:t>Limit the number of requests sent from the client application you are developing to an external service.</a:t>
-            </a:r>
-          </a:p>
-          <a:p>
-            <a:pPr marL="285750" indent="-285750">
-              <a:buFontTx/>
-              <a:buChar char="-"/>
-            </a:pPr>
-            <a:endParaRPr lang="en-US" dirty="0"/>
-          </a:p>
-          <a:p>
-            <a:pPr marL="285750" indent="-285750">
-              <a:buFontTx/>
-              <a:buChar char="-"/>
-            </a:pPr>
-            <a:r>
-              <a:rPr lang="en-US" dirty="0"/>
-              <a:t>Not only it is important to limit the load, but it also helps to eliminate the security concerns against malicious attacks (e.g., </a:t>
-            </a:r>
             <a:r>
               <a:rPr lang="en-US" dirty="0">
-                <a:hlinkClick r:id="rId2">
-                  <a:extLst>
-                    <a:ext uri="{A12FA001-AC4F-418D-AE19-62706E023703}">
-                      <ahyp:hlinkClr xmlns:ahyp="http://schemas.microsoft.com/office/drawing/2018/hyperlinkcolor" val="tx"/>
-                    </a:ext>
-                  </a:extLst>
-                </a:hlinkClick>
+                <a:hlinkClick r:id="rId3"/>
               </a:rPr>
-              <a:t>DoS or DDoS</a:t>
-            </a:r>
-            <a:r>
-              <a:rPr lang="en-US" dirty="0"/>
-              <a:t>)</a:t>
-            </a:r>
-          </a:p>
-          <a:p>
-            <a:pPr marL="285750" indent="-285750">
-              <a:buFontTx/>
-              <a:buChar char="-"/>
-            </a:pPr>
-            <a:endParaRPr lang="en-US" dirty="0"/>
-          </a:p>
-          <a:p>
-            <a:pPr marL="285750" lvl="1" indent="-285750">
-              <a:buFontTx/>
-              <a:buChar char="-"/>
-            </a:pPr>
-            <a:r>
-              <a:rPr lang="en-US" b="1" dirty="0"/>
-              <a:t> a) </a:t>
-            </a:r>
-            <a:r>
-              <a:rPr lang="en-US" b="1" i="1" dirty="0" err="1">
-                <a:solidFill>
-                  <a:srgbClr val="292929"/>
-                </a:solidFill>
-                <a:latin typeface="source-serif-pro"/>
-              </a:rPr>
-              <a:t>limitRefreshPeriod</a:t>
-            </a:r>
-            <a:r>
-              <a:rPr lang="en-US" b="1" dirty="0"/>
-              <a:t>: </a:t>
-            </a:r>
-            <a:r>
-              <a:rPr lang="en-US" i="1" dirty="0">
-                <a:solidFill>
-                  <a:srgbClr val="292929"/>
-                </a:solidFill>
-                <a:latin typeface="source-serif-pro"/>
-              </a:rPr>
-              <a:t>After each period the rate limiter sets its permissions count back to the </a:t>
-            </a:r>
-            <a:r>
-              <a:rPr lang="en-US" i="1" dirty="0" err="1">
-                <a:solidFill>
-                  <a:srgbClr val="292929"/>
-                </a:solidFill>
-                <a:latin typeface="source-serif-pro"/>
-              </a:rPr>
-              <a:t>limitForPeriod</a:t>
-            </a:r>
-            <a:r>
-              <a:rPr lang="en-US" i="1" dirty="0">
-                <a:solidFill>
-                  <a:srgbClr val="292929"/>
-                </a:solidFill>
-                <a:latin typeface="source-serif-pro"/>
-              </a:rPr>
-              <a:t> value.</a:t>
-            </a:r>
-          </a:p>
-          <a:p>
-            <a:pPr marL="285750" lvl="4" indent="-285750">
-              <a:buFontTx/>
-              <a:buChar char="-"/>
-            </a:pPr>
-            <a:r>
-              <a:rPr lang="en-US" b="1" dirty="0"/>
-              <a:t> b) </a:t>
-            </a:r>
-            <a:r>
-              <a:rPr lang="en-US" b="1" i="1" dirty="0" err="1">
-                <a:solidFill>
-                  <a:srgbClr val="292929"/>
-                </a:solidFill>
-                <a:latin typeface="source-serif-pro"/>
-              </a:rPr>
-              <a:t>limitForPeriod</a:t>
-            </a:r>
-            <a:r>
-              <a:rPr lang="en-US" b="1" dirty="0"/>
-              <a:t>: </a:t>
-            </a:r>
-            <a:r>
-              <a:rPr lang="en-US" i="1" dirty="0">
-                <a:solidFill>
-                  <a:srgbClr val="292929"/>
-                </a:solidFill>
-                <a:latin typeface="source-serif-pro"/>
-              </a:rPr>
-              <a:t>The number of permissions available during one limit refresh period</a:t>
-            </a:r>
-          </a:p>
-          <a:p>
-            <a:pPr marL="285750" lvl="4" indent="-285750">
-              <a:buFontTx/>
-              <a:buChar char="-"/>
-            </a:pPr>
-            <a:r>
-              <a:rPr lang="en-US" dirty="0"/>
-              <a:t> c) </a:t>
-            </a:r>
-            <a:r>
-              <a:rPr lang="en-US" b="1" i="1" dirty="0" err="1">
-                <a:solidFill>
-                  <a:srgbClr val="292929"/>
-                </a:solidFill>
-                <a:effectLst/>
-                <a:latin typeface="source-serif-pro"/>
-              </a:rPr>
-              <a:t>timeoutDuration</a:t>
-            </a:r>
-            <a:r>
-              <a:rPr lang="en-US" b="0" i="1" dirty="0">
-                <a:solidFill>
-                  <a:srgbClr val="292929"/>
-                </a:solidFill>
-                <a:effectLst/>
-                <a:latin typeface="source-serif-pro"/>
-              </a:rPr>
-              <a:t>: The default wait time a thread waits for a permission</a:t>
+              <a:t>https://resilience4j.readme.io/docs/retry</a:t>
             </a:r>
             <a:r>
               <a:rPr lang="en-US" dirty="0"/>
@@ -17687,91 +17564,32 @@
             </a:r>
           </a:p>
           <a:p>
-            <a:pPr marL="285750" indent="-285750">
-              <a:buFontTx/>
-              <a:buChar char="-"/>
-            </a:pPr>
-            <a:endParaRPr lang="en-US" sz="1500" b="1" dirty="0"/>
-          </a:p>
-          <a:p>
-            <a:pPr marL="285750" indent="-285750">
-              <a:buFontTx/>
-              <a:buChar char="-"/>
-            </a:pPr>
-            <a:r>
-              <a:rPr lang="en-US" dirty="0">
-                <a:hlinkClick r:id="rId3"/>
-              </a:rPr>
-              <a:t>https://resilience4j.readme.io/docs/ratelimiter</a:t>
-            </a:r>
+            <a:endParaRPr lang="en-US" dirty="0"/>
+          </a:p>
+          <a:p>
             <a:r>
               <a:rPr lang="en-US" dirty="0"/>
-              <a:t> </a:t>
+              <a:t>Use case:</a:t>
             </a:r>
           </a:p>
           <a:p>
-            <a:endParaRPr lang="en-US" sz="1500" dirty="0"/>
-          </a:p>
-          <a:p>
-            <a:pPr marL="285750" indent="-285750">
-              <a:buFontTx/>
-              <a:buChar char="-"/>
-            </a:pPr>
-            <a:endParaRPr lang="en-US" sz="1500" dirty="0"/>
+            <a:r>
+              <a:rPr lang="en-US" dirty="0"/>
+              <a:t>We know there are network latency issues in downstream/remote service, and we want to retry the call.</a:t>
+            </a:r>
+          </a:p>
+          <a:p>
+            <a:endParaRPr lang="en-US" dirty="0"/>
+          </a:p>
+          <a:p>
+            <a:endParaRPr lang="en-US" dirty="0"/>
           </a:p>
         </p:txBody>
       </p:sp>
-      <p:pic>
-        <p:nvPicPr>
-          <p:cNvPr id="1030" name="Picture 6">
-            <a:extLst>
-              <a:ext uri="{FF2B5EF4-FFF2-40B4-BE49-F238E27FC236}">
-                <a16:creationId xmlns:a16="http://schemas.microsoft.com/office/drawing/2014/main" id="{EA47ABD2-2A95-49A6-8E0C-BDE47E8989CC}"/>
-              </a:ext>
-            </a:extLst>
-          </p:cNvPr>
-          <p:cNvPicPr>
-            <a:picLocks noChangeAspect="1" noChangeArrowheads="1"/>
-          </p:cNvPicPr>
-          <p:nvPr/>
-        </p:nvPicPr>
-        <p:blipFill>
-          <a:blip r:embed="rId4">
-            <a:extLst>
-              <a:ext uri="{28A0092B-C50C-407E-A947-70E740481C1C}">
-                <a14:useLocalDpi xmlns:a14="http://schemas.microsoft.com/office/drawing/2010/main" val="0"/>
-              </a:ext>
-            </a:extLst>
-          </a:blip>
-          <a:srcRect/>
-          <a:stretch>
-            <a:fillRect/>
-          </a:stretch>
-        </p:blipFill>
-        <p:spPr bwMode="auto">
-          <a:xfrm>
-            <a:off x="4694945" y="1068081"/>
-            <a:ext cx="4091868" cy="3125453"/>
-          </a:xfrm>
-          <a:prstGeom prst="rect">
-            <a:avLst/>
-          </a:prstGeom>
-          <a:noFill/>
-          <a:extLst>
-            <a:ext uri="{909E8E84-426E-40DD-AFC4-6F175D3DCCD1}">
-              <a14:hiddenFill xmlns:a14="http://schemas.microsoft.com/office/drawing/2010/main">
-                <a:solidFill>
-                  <a:srgbClr val="FFFFFF"/>
-                </a:solidFill>
-              </a14:hiddenFill>
-            </a:ext>
-          </a:extLst>
-        </p:spPr>
-      </p:pic>
     </p:spTree>
     <p:extLst>
       <p:ext uri="{BB962C8B-B14F-4D97-AF65-F5344CB8AC3E}">
-        <p14:creationId xmlns:p14="http://schemas.microsoft.com/office/powerpoint/2010/main" val="3258092774"/>
+        <p14:creationId xmlns:p14="http://schemas.microsoft.com/office/powerpoint/2010/main" val="202709181"/>
       </p:ext>
     </p:extLst>
   </p:cSld>
@@ -17827,7 +17645,7 @@
           <a:p>
             <a:r>
               <a:rPr lang="en-US" dirty="0"/>
-              <a:t>Resilience4j Time Limiter</a:t>
+              <a:t>Resilience4j Rate Limiter</a:t>
             </a:r>
           </a:p>
         </p:txBody>
@@ -17879,7 +17697,7 @@
         <p:spPr>
           <a:xfrm>
             <a:off x="497283" y="949966"/>
-            <a:ext cx="5311846" cy="2954655"/>
+            <a:ext cx="4197662" cy="4231928"/>
           </a:xfrm>
           <a:prstGeom prst="rect">
             <a:avLst/>
@@ -17898,7 +17716,7 @@
             </a:pPr>
             <a:r>
               <a:rPr lang="en-US" dirty="0"/>
-              <a:t>It defines a timeout for each request, so every request that exceeds this timeout will fail.</a:t>
+              <a:t>Limit the number of requests sent from the client application you are developing to an external service.</a:t>
             </a:r>
           </a:p>
           <a:p>
@@ -17915,7 +17733,23 @@
             </a:pPr>
             <a:r>
               <a:rPr lang="en-US" dirty="0"/>
-              <a:t>If service is taking more than defined time, will return default response or failure.</a:t>
+              <a:t>Not only it is important to limit the load, but it also helps to eliminate the security concerns against malicious attacks (e.g., </a:t>
+            </a:r>
+            <a:r>
+              <a:rPr lang="en-US" dirty="0">
+                <a:hlinkClick r:id="rId2">
+                  <a:extLst>
+                    <a:ext uri="{A12FA001-AC4F-418D-AE19-62706E023703}">
+                      <ahyp:hlinkClr xmlns:ahyp="http://schemas.microsoft.com/office/drawing/2018/hyperlinkcolor" val="tx"/>
+                    </a:ext>
+                  </a:extLst>
+                </a:hlinkClick>
+              </a:rPr>
+              <a:t>DoS or DDoS</a:t>
+            </a:r>
+            <a:r>
+              <a:rPr lang="en-US" dirty="0"/>
+              <a:t>)</a:t>
             </a:r>
           </a:p>
           <a:p>
@@ -17941,7 +17775,7 @@
                 </a:solidFill>
                 <a:latin typeface="source-serif-pro"/>
               </a:rPr>
-              <a:t>timeoutDuration</a:t>
+              <a:t>limitRefreshPeriod</a:t>
             </a:r>
             <a:r>
               <a:rPr lang="en-US" b="1" dirty="0"/>
@@ -17954,7 +17788,25 @@
                 </a:solidFill>
                 <a:latin typeface="source-serif-pro"/>
               </a:rPr>
-              <a:t>After this period time limiter activates and fails the call.</a:t>
+              <a:t>After each period the rate limiter sets its permissions count back to the </a:t>
+            </a:r>
+            <a:r>
+              <a:rPr lang="en-US" i="1" dirty="0" err="1">
+                <a:solidFill>
+                  <a:srgbClr val="292929"/>
+                </a:solidFill>
+                <a:latin typeface="source-serif-pro"/>
+              </a:rPr>
+              <a:t>limitForPeriod</a:t>
+            </a:r>
+            <a:r>
+              <a:rPr lang="en-US" i="1" dirty="0">
+                <a:solidFill>
+                  <a:srgbClr val="292929"/>
+                </a:solidFill>
+                <a:latin typeface="source-serif-pro"/>
+              </a:rPr>
+              <a:t> value.</a:t>
             </a:r>
           </a:p>
           <a:p>
@@ -17973,7 +17825,7 @@
                 </a:solidFill>
                 <a:latin typeface="source-serif-pro"/>
               </a:rPr>
-              <a:t>cancelRunningFuture</a:t>
+              <a:t>limitForPeriod</a:t>
             </a:r>
             <a:r>
               <a:rPr lang="en-US" b="1" dirty="0"/>
@@ -17986,9 +17838,65 @@
                 </a:solidFill>
                 <a:latin typeface="source-serif-pro"/>
               </a:rPr>
-              <a:t>Boolean to cancel background tasks. </a:t>
+              <a:t>The number of permissions available during one limit refresh period</a:t>
             </a:r>
+          </a:p>
+          <a:p>
+            <a:pPr marL="285750" lvl="4" indent="-285750">
+              <a:buFontTx/>
+              <a:buChar char="-"/>
+            </a:pPr>
+            <a:r>
+              <a:rPr lang="en-US" dirty="0"/>
+              <a:t> c) </a:t>
+            </a:r>
+            <a:r>
+              <a:rPr lang="en-US" b="1" i="1" dirty="0" err="1">
+                <a:solidFill>
+                  <a:srgbClr val="292929"/>
+                </a:solidFill>
+                <a:effectLst/>
+                <a:latin typeface="source-serif-pro"/>
+              </a:rPr>
+              <a:t>timeoutDuration</a:t>
+            </a:r>
+            <a:r>
+              <a:rPr lang="en-US" b="0" i="1" dirty="0">
+                <a:solidFill>
+                  <a:srgbClr val="292929"/>
+                </a:solidFill>
+                <a:effectLst/>
+                <a:latin typeface="source-serif-pro"/>
+              </a:rPr>
+              <a:t>: The default wait time a thread waits for a permission</a:t>
+            </a:r>
+            <a:r>
+              <a:rPr lang="en-US" dirty="0"/>
+              <a:t> </a:t>
+            </a:r>
+          </a:p>
+          <a:p>
+            <a:pPr marL="285750" indent="-285750">
+              <a:buFontTx/>
+              <a:buChar char="-"/>
+            </a:pPr>
             <a:endParaRPr lang="en-US" sz="1500" b="1" dirty="0"/>
+          </a:p>
+          <a:p>
+            <a:pPr marL="285750" indent="-285750">
+              <a:buFontTx/>
+              <a:buChar char="-"/>
+            </a:pPr>
+            <a:r>
+              <a:rPr lang="en-US" dirty="0">
+                <a:hlinkClick r:id="rId3"/>
+              </a:rPr>
+              <a:t>https://resilience4j.readme.io/docs/ratelimiter</a:t>
+            </a:r>
+            <a:r>
+              <a:rPr lang="en-US" dirty="0"/>
+              <a:t> </a:t>
+            </a:r>
           </a:p>
           <a:p>
             <a:endParaRPr lang="en-US" sz="1500" dirty="0"/>
@@ -18000,35 +17908,59 @@
             </a:pPr>
             <a:endParaRPr lang="en-US" sz="1500" dirty="0"/>
           </a:p>
-          <a:p>
-            <a:pPr marL="285750" indent="-285750">
-              <a:buFontTx/>
-              <a:buChar char="-"/>
-            </a:pPr>
-            <a:endParaRPr lang="en-US" sz="1500" dirty="0"/>
-          </a:p>
-          <a:p>
-            <a:pPr marL="285750" indent="-285750">
-              <a:buFontTx/>
-              <a:buChar char="-"/>
-            </a:pPr>
-            <a:r>
-              <a:rPr lang="en-US" sz="1500" dirty="0">
-                <a:hlinkClick r:id="rId2"/>
-              </a:rPr>
-              <a:t>https://resilience4j.readme.io/docs/timeout</a:t>
-            </a:r>
-            <a:r>
-              <a:rPr lang="en-US" sz="1500" dirty="0"/>
-              <a:t> </a:t>
-            </a:r>
-          </a:p>
         </p:txBody>
       </p:sp>
+      <p:pic>
+        <p:nvPicPr>
+          <p:cNvPr id="1030" name="Picture 6">
+            <a:extLst>
+              <a:ext uri="{FF2B5EF4-FFF2-40B4-BE49-F238E27FC236}">
+                <a16:creationId xmlns:a16="http://schemas.microsoft.com/office/drawing/2014/main" id="{EA47ABD2-2A95-49A6-8E0C-BDE47E8989CC}"/>
+              </a:ext>
+            </a:extLst>
+          </p:cNvPr>
+          <p:cNvPicPr>
+            <a:picLocks noChangeAspect="1" noChangeArrowheads="1"/>
+          </p:cNvPicPr>
+          <p:nvPr/>
+        </p:nvPicPr>
+        <p:blipFill>
+          <a:blip r:embed="rId4">
+            <a:extLst>
+              <a:ext uri="{28A0092B-C50C-407E-A947-70E740481C1C}">
+                <a14:useLocalDpi xmlns:a14="http://schemas.microsoft.com/office/drawing/2010/main" val="0"/>
+              </a:ext>
+            </a:extLst>
+          </a:blip>
+          <a:srcRect/>
+          <a:stretch>
+            <a:fillRect/>
+          </a:stretch>
+        </p:blipFill>
+        <p:spPr bwMode="auto">
+          <a:xfrm>
+            <a:off x="4694945" y="1068081"/>
+            <a:ext cx="4091868" cy="3125453"/>
+          </a:xfrm>
+          <a:prstGeom prst="rect">
+            <a:avLst/>
+          </a:prstGeom>
+          <a:noFill/>
+          <a:extLst>
+            <a:ext uri="{909E8E84-426E-40DD-AFC4-6F175D3DCCD1}">
+              <a14:hiddenFill xmlns:a14="http://schemas.microsoft.com/office/drawing/2010/main">
+                <a:solidFill>
+                  <a:srgbClr val="FFFFFF"/>
+                </a:solidFill>
+              </a14:hiddenFill>
+            </a:ext>
+          </a:extLst>
+        </p:spPr>
+      </p:pic>
     </p:spTree>
     <p:extLst>
       <p:ext uri="{BB962C8B-B14F-4D97-AF65-F5344CB8AC3E}">
-        <p14:creationId xmlns:p14="http://schemas.microsoft.com/office/powerpoint/2010/main" val="2169980315"/>
+        <p14:creationId xmlns:p14="http://schemas.microsoft.com/office/powerpoint/2010/main" val="3258092774"/>
       </p:ext>
     </p:extLst>
   </p:cSld>
@@ -18084,7 +18016,7 @@
           <a:p>
             <a:r>
               <a:rPr lang="en-US" dirty="0"/>
-              <a:t>Resilience4j Bulkhead</a:t>
+              <a:t>Resilience4j Time Limiter</a:t>
             </a:r>
           </a:p>
         </p:txBody>
@@ -18126,7 +18058,7 @@
           <p:cNvPr id="4" name="TextBox 3">
             <a:extLst>
               <a:ext uri="{FF2B5EF4-FFF2-40B4-BE49-F238E27FC236}">
-                <a16:creationId xmlns:a16="http://schemas.microsoft.com/office/drawing/2014/main" id="{71FE4004-2AD6-4ED2-B00B-C5E92117ACEE}"/>
+                <a16:creationId xmlns:a16="http://schemas.microsoft.com/office/drawing/2014/main" id="{A59FBE4C-C91E-4622-88D3-A7A47769C790}"/>
               </a:ext>
             </a:extLst>
           </p:cNvPr>
@@ -18135,8 +18067,8 @@
         </p:nvSpPr>
         <p:spPr>
           <a:xfrm>
-            <a:off x="357187" y="794766"/>
-            <a:ext cx="7609372" cy="4031873"/>
+            <a:off x="497283" y="949966"/>
+            <a:ext cx="5311846" cy="2954655"/>
           </a:xfrm>
           <a:prstGeom prst="rect">
             <a:avLst/>
@@ -18155,7 +18087,7 @@
             </a:pPr>
             <a:r>
               <a:rPr lang="en-US" dirty="0"/>
-              <a:t>Do not burden service with calls more than its capacity and for that it controls the number of concurrent requests the service can take.</a:t>
+              <a:t>It defines a timeout for each request, so every request that exceeds this timeout will fail.</a:t>
             </a:r>
           </a:p>
           <a:p>
@@ -18172,88 +18104,15 @@
             </a:pPr>
             <a:r>
               <a:rPr lang="en-US" dirty="0"/>
-              <a:t>There are two implementations of bulkhead patterns in Resilience4j.</a:t>
+              <a:t>If service is taking more than defined time, will return default response or failure.</a:t>
             </a:r>
           </a:p>
           <a:p>
-            <a:pPr marL="285750" lvl="1" indent="-285750">
+            <a:pPr marL="285750" indent="-285750">
               <a:buFontTx/>
               <a:buChar char="-"/>
             </a:pPr>
-            <a:r>
-              <a:rPr lang="en-US" dirty="0"/>
-              <a:t>    a) </a:t>
-            </a:r>
-            <a:r>
-              <a:rPr lang="en-US" b="1" i="0" dirty="0">
-                <a:solidFill>
-                  <a:srgbClr val="292929"/>
-                </a:solidFill>
-                <a:effectLst/>
-                <a:latin typeface="source-serif-pro"/>
-              </a:rPr>
-              <a:t>Semaphore </a:t>
-            </a:r>
-            <a:r>
-              <a:rPr lang="en-US" b="0" i="0" dirty="0">
-                <a:solidFill>
-                  <a:srgbClr val="292929"/>
-                </a:solidFill>
-                <a:effectLst/>
-                <a:latin typeface="source-serif-pro"/>
-              </a:rPr>
-              <a:t>— In this approach, we limit the number of concurrent requests to the service. It will reject the incoming requests once the limit is hit</a:t>
-            </a:r>
-            <a:endParaRPr lang="en-US" dirty="0">
-              <a:solidFill>
-                <a:srgbClr val="292929"/>
-              </a:solidFill>
-              <a:latin typeface="source-serif-pro"/>
-            </a:endParaRPr>
-          </a:p>
-          <a:p>
-            <a:pPr marL="285750" lvl="1" indent="-285750">
-              <a:buFontTx/>
-              <a:buChar char="-"/>
-            </a:pPr>
-            <a:r>
-              <a:rPr lang="en-US" dirty="0">
-                <a:solidFill>
-                  <a:srgbClr val="292929"/>
-                </a:solidFill>
-                <a:latin typeface="source-serif-pro"/>
-              </a:rPr>
-              <a:t>     b) </a:t>
-            </a:r>
-            <a:r>
-              <a:rPr lang="en-US" b="1" i="0" dirty="0">
-                <a:solidFill>
-                  <a:srgbClr val="292929"/>
-                </a:solidFill>
-                <a:effectLst/>
-                <a:latin typeface="source-serif-pro"/>
-              </a:rPr>
-              <a:t>FixedThreadPoolBulkhead — </a:t>
-            </a:r>
-            <a:r>
-              <a:rPr lang="en-US" b="0" i="0" dirty="0">
-                <a:solidFill>
-                  <a:srgbClr val="292929"/>
-                </a:solidFill>
-                <a:effectLst/>
-                <a:latin typeface="source-serif-pro"/>
-              </a:rPr>
-              <a:t>In this approach, we isolate a set of thread pool from system resources, using only that thread pool for the service</a:t>
-            </a:r>
-          </a:p>
-          <a:p>
             <a:endParaRPr lang="en-US" dirty="0"/>
-          </a:p>
-          <a:p>
-            <a:r>
-              <a:rPr lang="en-US" dirty="0"/>
-              <a:t>Config:</a:t>
-            </a:r>
           </a:p>
           <a:p>
             <a:pPr marL="285750" lvl="1" indent="-285750">
@@ -18265,34 +18124,17 @@
               <a:t> a) </a:t>
             </a:r>
             <a:r>
-              <a:rPr lang="en-US" b="1" i="1" dirty="0">
+              <a:rPr lang="en-US" b="1" i="1" dirty="0" err="1">
                 <a:solidFill>
                   <a:srgbClr val="292929"/>
                 </a:solidFill>
-                <a:effectLst/>
                 <a:latin typeface="source-serif-pro"/>
               </a:rPr>
-              <a:t>maxConcurrentCall</a:t>
+              <a:t>timeoutDuration</a:t>
             </a:r>
             <a:r>
-              <a:rPr lang="en-US" b="1" i="0" dirty="0">
-                <a:solidFill>
-                  <a:srgbClr val="292929"/>
-                </a:solidFill>
-                <a:effectLst/>
-                <a:latin typeface="source-serif-pro"/>
-              </a:rPr>
-              <a:t>s</a:t>
-            </a:r>
-            <a:r>
-              <a:rPr lang="en-US" b="0" i="0" dirty="0">
-                <a:solidFill>
-                  <a:srgbClr val="292929"/>
-                </a:solidFill>
-                <a:effectLst/>
-                <a:latin typeface="source-serif-pro"/>
-              </a:rPr>
-              <a:t> is the max amount of parallel execution allowed by the bulkhead</a:t>
+              <a:rPr lang="en-US" b="1" dirty="0"/>
+              <a:t>: </a:t>
             </a:r>
             <a:r>
               <a:rPr lang="en-US" i="1" dirty="0">
@@ -18301,7 +18143,7 @@
                 </a:solidFill>
                 <a:latin typeface="source-serif-pro"/>
               </a:rPr>
-              <a:t>.</a:t>
+              <a:t>After this period time limiter activates and fails the call.</a:t>
             </a:r>
           </a:p>
           <a:p>
@@ -18314,52 +18156,37 @@
               <a:t> b) </a:t>
             </a:r>
             <a:r>
-              <a:rPr lang="en-US" b="1" i="1" dirty="0">
+              <a:rPr lang="en-US" b="1" i="1" dirty="0" err="1">
                 <a:solidFill>
                   <a:srgbClr val="292929"/>
                 </a:solidFill>
-                <a:effectLst/>
                 <a:latin typeface="source-serif-pro"/>
               </a:rPr>
-              <a:t>maxWaitDuration</a:t>
+              <a:t>cancelRunningFuture</a:t>
             </a:r>
             <a:r>
-              <a:rPr lang="en-US" b="0" i="0" dirty="0">
+              <a:rPr lang="en-US" b="1" dirty="0"/>
+              <a:t>: </a:t>
+            </a:r>
+            <a:r>
+              <a:rPr lang="en-US" i="1" dirty="0">
                 <a:solidFill>
                   <a:srgbClr val="292929"/>
                 </a:solidFill>
-                <a:effectLst/>
                 <a:latin typeface="source-serif-pro"/>
               </a:rPr>
-              <a:t> is the max amount of time a thread will be blocked for attempting to enter the maxConcurrentCalls count. Any additional requests will wait for the given duration. Otherwise, it will go with default/fallback method.</a:t>
+              <a:t>Boolean to cancel background tasks. </a:t>
             </a:r>
-          </a:p>
-          <a:p>
-            <a:pPr marL="285750" lvl="4" indent="-285750">
+            <a:endParaRPr lang="en-US" sz="1500" b="1" dirty="0"/>
+          </a:p>
+          <a:p>
+            <a:endParaRPr lang="en-US" sz="1500" dirty="0"/>
+          </a:p>
+          <a:p>
+            <a:pPr marL="285750" indent="-285750">
               <a:buFontTx/>
               <a:buChar char="-"/>
             </a:pPr>
-            <a:endParaRPr lang="en-US" sz="1500" dirty="0">
-              <a:solidFill>
-                <a:srgbClr val="292929"/>
-              </a:solidFill>
-              <a:latin typeface="source-serif-pro"/>
-            </a:endParaRPr>
-          </a:p>
-          <a:p>
-            <a:pPr marL="285750" lvl="4" indent="-285750">
-              <a:buFontTx/>
-              <a:buChar char="-"/>
-            </a:pPr>
-            <a:r>
-              <a:rPr lang="en-US" sz="1500" dirty="0">
-                <a:solidFill>
-                  <a:srgbClr val="292929"/>
-                </a:solidFill>
-                <a:latin typeface="source-serif-pro"/>
-              </a:rPr>
-              <a:t>Note: Config is shared across API’s</a:t>
-            </a:r>
             <a:endParaRPr lang="en-US" sz="1500" dirty="0"/>
           </a:p>
           <a:p>
@@ -18378,7 +18205,7 @@
               <a:rPr lang="en-US" sz="1500" dirty="0">
                 <a:hlinkClick r:id="rId2"/>
               </a:rPr>
-              <a:t>https://resilience4j.readme.io/docs/bulkhead</a:t>
+              <a:t>https://resilience4j.readme.io/docs/timeout</a:t>
             </a:r>
             <a:r>
               <a:rPr lang="en-US" sz="1500" dirty="0"/>
@@ -18390,7 +18217,7 @@
     </p:spTree>
     <p:extLst>
       <p:ext uri="{BB962C8B-B14F-4D97-AF65-F5344CB8AC3E}">
-        <p14:creationId xmlns:p14="http://schemas.microsoft.com/office/powerpoint/2010/main" val="2418118527"/>
+        <p14:creationId xmlns:p14="http://schemas.microsoft.com/office/powerpoint/2010/main" val="2169980315"/>
       </p:ext>
     </p:extLst>
   </p:cSld>
@@ -18446,7 +18273,7 @@
           <a:p>
             <a:r>
               <a:rPr lang="en-US" dirty="0"/>
-              <a:t>Flyway</a:t>
+              <a:t>Resilience4j Bulkhead</a:t>
             </a:r>
           </a:p>
         </p:txBody>
@@ -18488,7 +18315,7 @@
           <p:cNvPr id="4" name="TextBox 3">
             <a:extLst>
               <a:ext uri="{FF2B5EF4-FFF2-40B4-BE49-F238E27FC236}">
-                <a16:creationId xmlns:a16="http://schemas.microsoft.com/office/drawing/2014/main" id="{A59FBE4C-C91E-4622-88D3-A7A47769C790}"/>
+                <a16:creationId xmlns:a16="http://schemas.microsoft.com/office/drawing/2014/main" id="{71FE4004-2AD6-4ED2-B00B-C5E92117ACEE}"/>
               </a:ext>
             </a:extLst>
           </p:cNvPr>
@@ -18497,8 +18324,8 @@
         </p:nvSpPr>
         <p:spPr>
           <a:xfrm>
-            <a:off x="497283" y="949966"/>
-            <a:ext cx="5311846" cy="4031873"/>
+            <a:off x="357187" y="794766"/>
+            <a:ext cx="7609372" cy="4031873"/>
           </a:xfrm>
           <a:prstGeom prst="rect">
             <a:avLst/>
@@ -18517,19 +18344,8 @@
             </a:pPr>
             <a:r>
               <a:rPr lang="en-US" dirty="0"/>
-              <a:t>Flyway is an open-source tool for version controlling database. </a:t>
+              <a:t>Do not burden service with calls more than its capacity and for that it controls the number of concurrent requests the service can take.</a:t>
             </a:r>
-            <a:r>
-              <a:rPr lang="en-US" b="0" i="0" dirty="0">
-                <a:solidFill>
-                  <a:srgbClr val="292929"/>
-                </a:solidFill>
-                <a:effectLst/>
-                <a:latin typeface="source-serif-pro"/>
-              </a:rPr>
-              <a:t>It’s like the Git for the databases.</a:t>
-            </a:r>
-            <a:endParaRPr lang="en-US" dirty="0"/>
           </a:p>
           <a:p>
             <a:pPr marL="285750" indent="-285750">
@@ -18545,15 +18361,202 @@
             </a:pPr>
             <a:r>
               <a:rPr lang="en-US" dirty="0"/>
-              <a:t>Flyway enables you to write SQL scripts for your schemas and tables and version them to ensure consistency and offers the ability to roll back as needed.</a:t>
+              <a:t>There are two implementations of bulkhead patterns in Resilience4j.</a:t>
             </a:r>
+          </a:p>
+          <a:p>
+            <a:pPr marL="285750" lvl="1" indent="-285750">
+              <a:buFontTx/>
+              <a:buChar char="-"/>
+            </a:pPr>
+            <a:r>
+              <a:rPr lang="en-US" dirty="0"/>
+              <a:t>    a) </a:t>
+            </a:r>
+            <a:r>
+              <a:rPr lang="en-US" b="1" i="0" dirty="0">
+                <a:solidFill>
+                  <a:srgbClr val="292929"/>
+                </a:solidFill>
+                <a:effectLst/>
+                <a:latin typeface="source-serif-pro"/>
+              </a:rPr>
+              <a:t>Semaphore </a:t>
+            </a:r>
+            <a:r>
+              <a:rPr lang="en-US" b="0" i="0" dirty="0">
+                <a:solidFill>
+                  <a:srgbClr val="292929"/>
+                </a:solidFill>
+                <a:effectLst/>
+                <a:latin typeface="source-serif-pro"/>
+              </a:rPr>
+              <a:t>— In this approach, we limit the number of concurrent requests to the service. It will reject the incoming requests once the limit is hit</a:t>
+            </a:r>
+            <a:endParaRPr lang="en-US" dirty="0">
+              <a:solidFill>
+                <a:srgbClr val="292929"/>
+              </a:solidFill>
+              <a:latin typeface="source-serif-pro"/>
+            </a:endParaRPr>
+          </a:p>
+          <a:p>
+            <a:pPr marL="285750" lvl="1" indent="-285750">
+              <a:buFontTx/>
+              <a:buChar char="-"/>
+            </a:pPr>
+            <a:r>
+              <a:rPr lang="en-US" dirty="0">
+                <a:solidFill>
+                  <a:srgbClr val="292929"/>
+                </a:solidFill>
+                <a:latin typeface="source-serif-pro"/>
+              </a:rPr>
+              <a:t>     b) </a:t>
+            </a:r>
+            <a:r>
+              <a:rPr lang="en-US" b="1" i="0" dirty="0">
+                <a:solidFill>
+                  <a:srgbClr val="292929"/>
+                </a:solidFill>
+                <a:effectLst/>
+                <a:latin typeface="source-serif-pro"/>
+              </a:rPr>
+              <a:t>FixedThreadPoolBulkhead — </a:t>
+            </a:r>
+            <a:r>
+              <a:rPr lang="en-US" b="0" i="0" dirty="0">
+                <a:solidFill>
+                  <a:srgbClr val="292929"/>
+                </a:solidFill>
+                <a:effectLst/>
+                <a:latin typeface="source-serif-pro"/>
+              </a:rPr>
+              <a:t>In this approach, we isolate a set of thread pool from system resources, using only that thread pool for the service</a:t>
+            </a:r>
+          </a:p>
+          <a:p>
+            <a:endParaRPr lang="en-US" dirty="0"/>
+          </a:p>
+          <a:p>
+            <a:r>
+              <a:rPr lang="en-US" dirty="0"/>
+              <a:t>Config:</a:t>
+            </a:r>
+          </a:p>
+          <a:p>
+            <a:pPr marL="285750" lvl="1" indent="-285750">
+              <a:buFontTx/>
+              <a:buChar char="-"/>
+            </a:pPr>
+            <a:r>
+              <a:rPr lang="en-US" b="1" dirty="0"/>
+              <a:t> a) </a:t>
+            </a:r>
+            <a:r>
+              <a:rPr lang="en-US" b="1" i="1" dirty="0">
+                <a:solidFill>
+                  <a:srgbClr val="292929"/>
+                </a:solidFill>
+                <a:effectLst/>
+                <a:latin typeface="source-serif-pro"/>
+              </a:rPr>
+              <a:t>maxConcurrentCall</a:t>
+            </a:r>
+            <a:r>
+              <a:rPr lang="en-US" b="1" i="0" dirty="0">
+                <a:solidFill>
+                  <a:srgbClr val="292929"/>
+                </a:solidFill>
+                <a:effectLst/>
+                <a:latin typeface="source-serif-pro"/>
+              </a:rPr>
+              <a:t>s</a:t>
+            </a:r>
+            <a:r>
+              <a:rPr lang="en-US" b="0" i="0" dirty="0">
+                <a:solidFill>
+                  <a:srgbClr val="292929"/>
+                </a:solidFill>
+                <a:effectLst/>
+                <a:latin typeface="source-serif-pro"/>
+              </a:rPr>
+              <a:t> is the max amount of parallel execution allowed by the bulkhead</a:t>
+            </a:r>
+            <a:r>
+              <a:rPr lang="en-US" i="1" dirty="0">
+                <a:solidFill>
+                  <a:srgbClr val="292929"/>
+                </a:solidFill>
+                <a:latin typeface="source-serif-pro"/>
+              </a:rPr>
+              <a:t>.</a:t>
+            </a:r>
+          </a:p>
+          <a:p>
+            <a:pPr marL="285750" lvl="4" indent="-285750">
+              <a:buFontTx/>
+              <a:buChar char="-"/>
+            </a:pPr>
+            <a:r>
+              <a:rPr lang="en-US" b="1" dirty="0"/>
+              <a:t> b) </a:t>
+            </a:r>
+            <a:r>
+              <a:rPr lang="en-US" b="1" i="1" dirty="0">
+                <a:solidFill>
+                  <a:srgbClr val="292929"/>
+                </a:solidFill>
+                <a:effectLst/>
+                <a:latin typeface="source-serif-pro"/>
+              </a:rPr>
+              <a:t>maxWaitDuration</a:t>
+            </a:r>
+            <a:r>
+              <a:rPr lang="en-US" b="0" i="0" dirty="0">
+                <a:solidFill>
+                  <a:srgbClr val="292929"/>
+                </a:solidFill>
+                <a:effectLst/>
+                <a:latin typeface="source-serif-pro"/>
+              </a:rPr>
+              <a:t> is the max amount of time a thread will be blocked for attempting to enter the maxConcurrentCalls count. Any additional requests will wait for the given duration. Otherwise, it will go with default/fallback method.</a:t>
+            </a:r>
+          </a:p>
+          <a:p>
+            <a:pPr marL="285750" lvl="4" indent="-285750">
+              <a:buFontTx/>
+              <a:buChar char="-"/>
+            </a:pPr>
+            <a:endParaRPr lang="en-US" sz="1500" dirty="0">
+              <a:solidFill>
+                <a:srgbClr val="292929"/>
+              </a:solidFill>
+              <a:latin typeface="source-serif-pro"/>
+            </a:endParaRPr>
+          </a:p>
+          <a:p>
+            <a:pPr marL="285750" lvl="4" indent="-285750">
+              <a:buFontTx/>
+              <a:buChar char="-"/>
+            </a:pPr>
+            <a:r>
+              <a:rPr lang="en-US" sz="1500" dirty="0">
+                <a:solidFill>
+                  <a:srgbClr val="292929"/>
+                </a:solidFill>
+                <a:latin typeface="source-serif-pro"/>
+              </a:rPr>
+              <a:t>Note: Config is shared across API’s</a:t>
+            </a:r>
+            <a:endParaRPr lang="en-US" sz="1500" dirty="0"/>
           </a:p>
           <a:p>
             <a:pPr marL="285750" indent="-285750">
               <a:buFontTx/>
               <a:buChar char="-"/>
             </a:pPr>
-            <a:endParaRPr lang="en-US" dirty="0"/>
+            <a:endParaRPr lang="en-US" sz="1500" dirty="0"/>
           </a:p>
           <a:p>
             <a:pPr marL="285750" indent="-285750">
@@ -18561,95 +18564,22 @@
               <a:buChar char="-"/>
             </a:pPr>
             <a:r>
-              <a:rPr lang="en-US" dirty="0"/>
-              <a:t>By default, Flyway will check for migration files inside </a:t>
-            </a:r>
-            <a:r>
-              <a:rPr lang="en-US" dirty="0" err="1"/>
-              <a:t>src</a:t>
-            </a:r>
-            <a:r>
-              <a:rPr lang="en-US" dirty="0"/>
-              <a:t>/main/resources/</a:t>
-            </a:r>
-            <a:r>
-              <a:rPr lang="en-US" dirty="0" err="1"/>
-              <a:t>db</a:t>
-            </a:r>
-            <a:r>
-              <a:rPr lang="en-US" dirty="0"/>
-              <a:t>/migration. If you used the Spring Initializer to add Flyway, this directory has already been created for you. If not, create that directory.</a:t>
-            </a:r>
-          </a:p>
-          <a:p>
-            <a:pPr marL="285750" indent="-285750">
-              <a:buFontTx/>
-              <a:buChar char="-"/>
-            </a:pPr>
-            <a:endParaRPr lang="en-US" dirty="0"/>
-          </a:p>
-          <a:p>
-            <a:pPr marL="285750" indent="-285750">
-              <a:buFontTx/>
-              <a:buChar char="-"/>
-            </a:pPr>
-            <a:r>
-              <a:rPr lang="en-US" dirty="0"/>
-              <a:t>The migration file should be named as such: V1__Create_customer_table.sql </a:t>
-            </a:r>
-            <a:r>
-              <a:rPr lang="en-US" dirty="0" err="1"/>
-              <a:t>etc</a:t>
-            </a:r>
-            <a:endParaRPr lang="en-US" dirty="0"/>
-          </a:p>
-          <a:p>
-            <a:pPr marL="285750" indent="-285750">
-              <a:buFontTx/>
-              <a:buChar char="-"/>
-            </a:pPr>
-            <a:endParaRPr lang="en-US" sz="1500" b="1" dirty="0"/>
-          </a:p>
-          <a:p>
-            <a:pPr marL="285750" indent="-285750">
-              <a:buFontTx/>
-              <a:buChar char="-"/>
-            </a:pPr>
-            <a:r>
-              <a:rPr lang="en-US" dirty="0"/>
-              <a:t>Alternate</a:t>
-            </a:r>
-            <a:r>
-              <a:rPr lang="en-US" sz="1500" dirty="0"/>
-              <a:t>: </a:t>
-            </a:r>
-            <a:r>
               <a:rPr lang="en-US" sz="1500" dirty="0">
                 <a:hlinkClick r:id="rId2"/>
               </a:rPr>
-              <a:t>https://www.liquibase.org/get-started/quickstart</a:t>
+              <a:t>https://resilience4j.readme.io/docs/bulkhead</a:t>
             </a:r>
             <a:r>
               <a:rPr lang="en-US" sz="1500" dirty="0"/>
               <a:t> </a:t>
             </a:r>
           </a:p>
-          <a:p>
-            <a:endParaRPr lang="en-US" sz="1500" dirty="0"/>
-          </a:p>
-          <a:p>
-            <a:pPr marL="285750" indent="-285750">
-              <a:buFontTx/>
-              <a:buChar char="-"/>
-            </a:pPr>
-            <a:endParaRPr lang="en-US" sz="1500" dirty="0"/>
-          </a:p>
         </p:txBody>
       </p:sp>
     </p:spTree>
     <p:extLst>
       <p:ext uri="{BB962C8B-B14F-4D97-AF65-F5344CB8AC3E}">
-        <p14:creationId xmlns:p14="http://schemas.microsoft.com/office/powerpoint/2010/main" val="2912582399"/>
+        <p14:creationId xmlns:p14="http://schemas.microsoft.com/office/powerpoint/2010/main" val="2418118527"/>
       </p:ext>
     </p:extLst>
   </p:cSld>
@@ -18690,6 +18620,289 @@
       </p:grpSpPr>
       <p:sp>
         <p:nvSpPr>
+          <p:cNvPr id="2" name="Title 1"/>
+          <p:cNvSpPr>
+            <a:spLocks noGrp="1"/>
+          </p:cNvSpPr>
+          <p:nvPr>
+            <p:ph type="title"/>
+          </p:nvPr>
+        </p:nvSpPr>
+        <p:spPr/>
+        <p:txBody>
+          <a:bodyPr/>
+          <a:lstStyle/>
+          <a:p>
+            <a:r>
+              <a:rPr lang="en-US" dirty="0"/>
+              <a:t>Flyway</a:t>
+            </a:r>
+          </a:p>
+        </p:txBody>
+      </p:sp>
+      <p:sp>
+        <p:nvSpPr>
+          <p:cNvPr id="3" name="Slide Number Placeholder 2"/>
+          <p:cNvSpPr>
+            <a:spLocks noGrp="1"/>
+          </p:cNvSpPr>
+          <p:nvPr>
+            <p:ph type="sldNum" idx="12"/>
+          </p:nvPr>
+        </p:nvSpPr>
+        <p:spPr/>
+        <p:txBody>
+          <a:bodyPr/>
+          <a:lstStyle/>
+          <a:p>
+            <a:pPr marL="0" lvl="0" indent="0">
+              <a:spcBef>
+                <a:spcPts val="0"/>
+              </a:spcBef>
+              <a:spcAft>
+                <a:spcPts val="0"/>
+              </a:spcAft>
+              <a:buNone/>
+            </a:pPr>
+            <a:fld id="{00000000-1234-1234-1234-123412341234}" type="slidenum">
+              <a:rPr lang="en-US" smtClean="0"/>
+              <a:t>14</a:t>
+            </a:fld>
+            <a:endParaRPr lang="en-US" dirty="0"/>
+          </a:p>
+        </p:txBody>
+      </p:sp>
+      <p:sp>
+        <p:nvSpPr>
+          <p:cNvPr id="4" name="TextBox 3">
+            <a:extLst>
+              <a:ext uri="{FF2B5EF4-FFF2-40B4-BE49-F238E27FC236}">
+                <a16:creationId xmlns:a16="http://schemas.microsoft.com/office/drawing/2014/main" id="{A59FBE4C-C91E-4622-88D3-A7A47769C790}"/>
+              </a:ext>
+            </a:extLst>
+          </p:cNvPr>
+          <p:cNvSpPr txBox="1"/>
+          <p:nvPr/>
+        </p:nvSpPr>
+        <p:spPr>
+          <a:xfrm>
+            <a:off x="497283" y="949966"/>
+            <a:ext cx="6916158" cy="3847207"/>
+          </a:xfrm>
+          <a:prstGeom prst="rect">
+            <a:avLst/>
+          </a:prstGeom>
+          <a:noFill/>
+        </p:spPr>
+        <p:txBody>
+          <a:bodyPr wrap="square" rtlCol="0">
+            <a:spAutoFit/>
+          </a:bodyPr>
+          <a:lstStyle/>
+          <a:p>
+            <a:pPr marL="285750" indent="-285750">
+              <a:buFontTx/>
+              <a:buChar char="-"/>
+            </a:pPr>
+            <a:r>
+              <a:rPr lang="en-US" dirty="0"/>
+              <a:t>Flyway is an open-source tool for version controlling database. </a:t>
+            </a:r>
+            <a:r>
+              <a:rPr lang="en-US" b="0" i="0" dirty="0">
+                <a:solidFill>
+                  <a:srgbClr val="292929"/>
+                </a:solidFill>
+                <a:effectLst/>
+                <a:latin typeface="source-serif-pro"/>
+              </a:rPr>
+              <a:t>It’s like the Git for the databases.</a:t>
+            </a:r>
+            <a:endParaRPr lang="en-US" dirty="0"/>
+          </a:p>
+          <a:p>
+            <a:pPr marL="285750" indent="-285750">
+              <a:buFontTx/>
+              <a:buChar char="-"/>
+            </a:pPr>
+            <a:endParaRPr lang="en-US" dirty="0"/>
+          </a:p>
+          <a:p>
+            <a:pPr marL="285750" indent="-285750">
+              <a:buFontTx/>
+              <a:buChar char="-"/>
+            </a:pPr>
+            <a:r>
+              <a:rPr lang="en-US" dirty="0"/>
+              <a:t>Flyway enables you to write SQL scripts for your schemas and tables and version them to ensure consistency and offers the ability to roll back as needed.</a:t>
+            </a:r>
+          </a:p>
+          <a:p>
+            <a:pPr marL="285750" indent="-285750">
+              <a:buFontTx/>
+              <a:buChar char="-"/>
+            </a:pPr>
+            <a:endParaRPr lang="en-US" dirty="0"/>
+          </a:p>
+          <a:p>
+            <a:pPr marL="285750" indent="-285750">
+              <a:buFontTx/>
+              <a:buChar char="-"/>
+            </a:pPr>
+            <a:r>
+              <a:rPr lang="en-US" dirty="0"/>
+              <a:t>By default, Flyway will check for migration files inside </a:t>
+            </a:r>
+            <a:r>
+              <a:rPr lang="en-US" dirty="0" err="1"/>
+              <a:t>src</a:t>
+            </a:r>
+            <a:r>
+              <a:rPr lang="en-US" dirty="0"/>
+              <a:t>/main/resources/</a:t>
+            </a:r>
+            <a:r>
+              <a:rPr lang="en-US" dirty="0" err="1"/>
+              <a:t>db</a:t>
+            </a:r>
+            <a:r>
+              <a:rPr lang="en-US" dirty="0"/>
+              <a:t>/migration. If you used the Spring Initializer to add Flyway, this directory has already been created for you. If not, create that directory.</a:t>
+            </a:r>
+          </a:p>
+          <a:p>
+            <a:pPr marL="285750" indent="-285750">
+              <a:buFontTx/>
+              <a:buChar char="-"/>
+            </a:pPr>
+            <a:endParaRPr lang="en-US" dirty="0"/>
+          </a:p>
+          <a:p>
+            <a:pPr marL="285750" indent="-285750">
+              <a:buFontTx/>
+              <a:buChar char="-"/>
+            </a:pPr>
+            <a:r>
+              <a:rPr lang="en-US" dirty="0"/>
+              <a:t>The migration file should be named as such: V1__Create_customer_table.sql </a:t>
+            </a:r>
+            <a:r>
+              <a:rPr lang="en-US" dirty="0" err="1"/>
+              <a:t>etc</a:t>
+            </a:r>
+            <a:endParaRPr lang="en-US" dirty="0"/>
+          </a:p>
+          <a:p>
+            <a:pPr marL="285750" indent="-285750">
+              <a:buFontTx/>
+              <a:buChar char="-"/>
+            </a:pPr>
+            <a:endParaRPr lang="en-US" sz="1500" b="1" dirty="0"/>
+          </a:p>
+          <a:p>
+            <a:pPr marL="285750" indent="-285750">
+              <a:buFontTx/>
+              <a:buChar char="-"/>
+            </a:pPr>
+            <a:r>
+              <a:rPr lang="en-US" dirty="0"/>
+              <a:t>Alternate tool</a:t>
+            </a:r>
+            <a:r>
+              <a:rPr lang="en-US" sz="1500" dirty="0"/>
+              <a:t>: </a:t>
+            </a:r>
+            <a:r>
+              <a:rPr lang="en-US" sz="1500" dirty="0">
+                <a:hlinkClick r:id="rId2"/>
+              </a:rPr>
+              <a:t>https://www.liquibase.org/get-started/quickstart</a:t>
+            </a:r>
+            <a:r>
+              <a:rPr lang="en-US" sz="1500" dirty="0"/>
+              <a:t> </a:t>
+            </a:r>
+          </a:p>
+          <a:p>
+            <a:pPr marL="285750" indent="-285750">
+              <a:buFontTx/>
+              <a:buChar char="-"/>
+            </a:pPr>
+            <a:endParaRPr lang="en-US" sz="1500" dirty="0"/>
+          </a:p>
+          <a:p>
+            <a:pPr marL="285750" indent="-285750">
+              <a:buFontTx/>
+              <a:buChar char="-"/>
+            </a:pPr>
+            <a:r>
+              <a:rPr lang="en-US" sz="1500">
+                <a:hlinkClick r:id="rId3"/>
+              </a:rPr>
+              <a:t>https://flywaydb.org/documentation/command/undo</a:t>
+            </a:r>
+            <a:r>
+              <a:rPr lang="en-US" sz="1500"/>
+              <a:t> </a:t>
+            </a:r>
+            <a:endParaRPr lang="en-US" sz="1500" dirty="0"/>
+          </a:p>
+          <a:p>
+            <a:endParaRPr lang="en-US" sz="1500" dirty="0"/>
+          </a:p>
+          <a:p>
+            <a:pPr marL="285750" indent="-285750">
+              <a:buFontTx/>
+              <a:buChar char="-"/>
+            </a:pPr>
+            <a:endParaRPr lang="en-US" sz="1500" dirty="0"/>
+          </a:p>
+        </p:txBody>
+      </p:sp>
+    </p:spTree>
+    <p:extLst>
+      <p:ext uri="{BB962C8B-B14F-4D97-AF65-F5344CB8AC3E}">
+        <p14:creationId xmlns:p14="http://schemas.microsoft.com/office/powerpoint/2010/main" val="2912582399"/>
+      </p:ext>
+    </p:extLst>
+  </p:cSld>
+  <p:clrMapOvr>
+    <a:masterClrMapping/>
+  </p:clrMapOvr>
+  <mc:AlternateContent xmlns:mc="http://schemas.openxmlformats.org/markup-compatibility/2006" xmlns:p14="http://schemas.microsoft.com/office/powerpoint/2010/main">
+    <mc:Choice Requires="p14">
+      <p:transition p14:dur="100">
+        <p:cut/>
+      </p:transition>
+    </mc:Choice>
+    <mc:Fallback xmlns="">
+      <p:transition>
+        <p:cut/>
+      </p:transition>
+    </mc:Fallback>
+  </mc:AlternateContent>
+</p:sld>
+</file>
+
+<file path=ppt/slides/slide15.xml><?xml version="1.0" encoding="utf-8"?>
+<p:sld xmlns:a="http://schemas.openxmlformats.org/drawingml/2006/main" xmlns:r="http://schemas.openxmlformats.org/officeDocument/2006/relationships" xmlns:p="http://schemas.openxmlformats.org/presentationml/2006/main">
+  <p:cSld>
+    <p:spTree>
+      <p:nvGrpSpPr>
+        <p:cNvPr id="1" name=""/>
+        <p:cNvGrpSpPr/>
+        <p:nvPr/>
+      </p:nvGrpSpPr>
+      <p:grpSpPr>
+        <a:xfrm>
+          <a:off x="0" y="0"/>
+          <a:ext cx="0" cy="0"/>
+          <a:chOff x="0" y="0"/>
+          <a:chExt cx="0" cy="0"/>
+        </a:xfrm>
+      </p:grpSpPr>
+      <p:sp>
+        <p:nvSpPr>
           <p:cNvPr id="2" name="Text Placeholder 1"/>
           <p:cNvSpPr>
             <a:spLocks noGrp="1"/>
@@ -18750,7 +18963,7 @@
             </a:pPr>
             <a:fld id="{00000000-1234-1234-1234-123412341234}" type="slidenum">
               <a:rPr lang="en-US" smtClean="0"/>
-              <a:t>14</a:t>
+              <a:t>15</a:t>
             </a:fld>
             <a:endParaRPr lang="en-US" dirty="0"/>
           </a:p>
@@ -18950,7 +19163,7 @@
                   <a:schemeClr val="bg2"/>
                 </a:solidFill>
               </a:rPr>
-              <a:t>What is Circuit Breaker?</a:t>
+              <a:t>Resilience Patterns</a:t>
             </a:r>
           </a:p>
           <a:p>
@@ -18972,51 +19185,7 @@
                   <a:schemeClr val="bg2"/>
                 </a:solidFill>
               </a:rPr>
-              <a:t>Circuit Breaker State</a:t>
-            </a:r>
-          </a:p>
-          <a:p>
-            <a:pPr marL="812800" lvl="1" indent="-285750">
-              <a:lnSpc>
-                <a:spcPct val="150000"/>
-              </a:lnSpc>
-              <a:spcBef>
-                <a:spcPts val="0"/>
-              </a:spcBef>
-              <a:buClr>
-                <a:srgbClr val="FFFFFF"/>
-              </a:buClr>
-              <a:buSzPts val="2500"/>
-            </a:pPr>
-            <a:r>
-              <a:rPr lang="en-US" sz="1600" b="1" dirty="0">
-                <a:solidFill>
-                  <a:schemeClr val="bg2"/>
-                </a:solidFill>
-              </a:rPr>
-              <a:t>Circuit Breaker Type</a:t>
-            </a:r>
-          </a:p>
-          <a:p>
-            <a:pPr marL="812800" lvl="1" indent="-285750">
-              <a:lnSpc>
-                <a:spcPct val="150000"/>
-              </a:lnSpc>
-              <a:spcBef>
-                <a:spcPts val="0"/>
-              </a:spcBef>
-              <a:buClr>
-                <a:srgbClr val="FFFFFF"/>
-              </a:buClr>
-              <a:buSzPts val="2500"/>
-            </a:pPr>
-            <a:r>
-              <a:rPr lang="en-US" sz="1600" b="1" dirty="0">
-                <a:solidFill>
-                  <a:schemeClr val="bg2"/>
-                </a:solidFill>
-              </a:rPr>
-              <a:t>Retires, Rate Limiter, Time Limiter and Bulkhead</a:t>
+              <a:t>Circuit Breaker, Retires, Rate Limiter, Time Limiter and Bulkhead</a:t>
             </a:r>
           </a:p>
           <a:p>
@@ -19492,10 +19661,9 @@
           <a:lstStyle/>
           <a:p>
             <a:r>
-              <a:rPr lang="en-US"/>
-              <a:t>What is Circuit Breaker?</a:t>
+              <a:rPr lang="en-US" dirty="0"/>
+              <a:t>Resilience Patterns</a:t>
             </a:r>
-            <a:endParaRPr lang="en-US" dirty="0"/>
           </a:p>
         </p:txBody>
       </p:sp>
@@ -19539,8 +19707,8 @@
         </p:nvSpPr>
         <p:spPr>
           <a:xfrm>
-            <a:off x="489599" y="794766"/>
-            <a:ext cx="4873856" cy="3801041"/>
+            <a:off x="497282" y="949966"/>
+            <a:ext cx="8224096" cy="3662541"/>
           </a:xfrm>
           <a:prstGeom prst="rect">
             <a:avLst/>
@@ -19553,128 +19721,203 @@
           </a:bodyPr>
           <a:lstStyle/>
           <a:p>
+            <a:pPr marL="285750" indent="-285750">
+              <a:buFontTx/>
+              <a:buChar char="-"/>
+            </a:pPr>
             <a:r>
-              <a:rPr lang="en-US" sz="1500" dirty="0"/>
-              <a:t>-</a:t>
-            </a:r>
-            <a:r>
-              <a:rPr lang="en-US" sz="1500" dirty="0">
+              <a:rPr lang="en-US" sz="1800" dirty="0">
                 <a:latin typeface="Calibri" panose="020F0502020204030204" pitchFamily="34" charset="0"/>
                 <a:cs typeface="Calibri" panose="020F0502020204030204" pitchFamily="34" charset="0"/>
               </a:rPr>
-              <a:t> Original idea comes from electronic engineering where it comes in a form of automatic switch that designed to protected electrical circuit from damage by excess of current in the circuit.</a:t>
+              <a:t>Circuit Breaker (</a:t>
             </a:r>
-          </a:p>
-          <a:p>
-            <a:endParaRPr lang="en-US" sz="1500" dirty="0">
+            <a:r>
+              <a:rPr lang="en-US" sz="1600" dirty="0">
+                <a:latin typeface="Calibri" panose="020F0502020204030204" pitchFamily="34" charset="0"/>
+                <a:cs typeface="Calibri" panose="020F0502020204030204" pitchFamily="34" charset="0"/>
+              </a:rPr>
+              <a:t>After a number of failed attempts, we can consider that the service is unavailable/overloaded and eagerly reject all subsequent requests to it.</a:t>
+            </a:r>
+            <a:r>
+              <a:rPr lang="en-US" sz="1800" dirty="0">
+                <a:latin typeface="Calibri" panose="020F0502020204030204" pitchFamily="34" charset="0"/>
+                <a:cs typeface="Calibri" panose="020F0502020204030204" pitchFamily="34" charset="0"/>
+              </a:rPr>
+              <a:t>)</a:t>
+            </a:r>
+          </a:p>
+          <a:p>
+            <a:pPr marL="285750" indent="-285750">
+              <a:buFontTx/>
+              <a:buChar char="-"/>
+            </a:pPr>
+            <a:endParaRPr lang="en-US" sz="1800" dirty="0">
               <a:latin typeface="Calibri" panose="020F0502020204030204" pitchFamily="34" charset="0"/>
               <a:cs typeface="Calibri" panose="020F0502020204030204" pitchFamily="34" charset="0"/>
             </a:endParaRPr>
           </a:p>
           <a:p>
+            <a:pPr marL="285750" indent="-285750">
+              <a:buFontTx/>
+              <a:buChar char="-"/>
+            </a:pPr>
             <a:r>
-              <a:rPr lang="en-US" sz="1500" dirty="0">
+              <a:rPr lang="en-US" sz="1800" dirty="0">
                 <a:latin typeface="Calibri" panose="020F0502020204030204" pitchFamily="34" charset="0"/>
                 <a:cs typeface="Calibri" panose="020F0502020204030204" pitchFamily="34" charset="0"/>
               </a:rPr>
-              <a:t>- The concept of a circuit breaker is to prevent calls to microservice when it’s known the call may fail or time out.</a:t>
+              <a:t>Retry </a:t>
             </a:r>
-          </a:p>
-          <a:p>
-            <a:endParaRPr lang="en-US" sz="1600" dirty="0"/>
-          </a:p>
-          <a:p>
             <a:r>
-              <a:rPr lang="en-US" sz="1500" dirty="0">
+              <a:rPr lang="en-US" sz="1600" dirty="0">
                 <a:latin typeface="Calibri" panose="020F0502020204030204" pitchFamily="34" charset="0"/>
                 <a:cs typeface="Calibri" panose="020F0502020204030204" pitchFamily="34" charset="0"/>
               </a:rPr>
-              <a:t>- This is done so that clients don’t waste their valuable resources handling requests that are likely to fail. </a:t>
+              <a:t>(automatically retry a failed call)</a:t>
             </a:r>
           </a:p>
           <a:p>
-            <a:endParaRPr lang="en-US" sz="1500" dirty="0">
+            <a:pPr marL="285750" indent="-285750">
+              <a:buFontTx/>
+              <a:buChar char="-"/>
+            </a:pPr>
+            <a:endParaRPr lang="en-US" sz="1800" dirty="0">
               <a:latin typeface="Calibri" panose="020F0502020204030204" pitchFamily="34" charset="0"/>
               <a:cs typeface="Calibri" panose="020F0502020204030204" pitchFamily="34" charset="0"/>
             </a:endParaRPr>
           </a:p>
           <a:p>
+            <a:pPr marL="285750" indent="-285750">
+              <a:buFontTx/>
+              <a:buChar char="-"/>
+            </a:pPr>
             <a:r>
-              <a:rPr lang="en-US" sz="1500" dirty="0">
+              <a:rPr lang="en-US" sz="1800" dirty="0">
                 <a:latin typeface="Calibri" panose="020F0502020204030204" pitchFamily="34" charset="0"/>
                 <a:cs typeface="Calibri" panose="020F0502020204030204" pitchFamily="34" charset="0"/>
               </a:rPr>
-              <a:t>- Using this concept, we can give the server some spare time to recover.</a:t>
+              <a:t>Rate Limiter </a:t>
             </a:r>
-          </a:p>
-          <a:p>
-            <a:endParaRPr lang="en-US" sz="1500" dirty="0">
+            <a:r>
+              <a:rPr lang="en-US" sz="1600" dirty="0">
+                <a:latin typeface="Calibri" panose="020F0502020204030204" pitchFamily="34" charset="0"/>
+                <a:cs typeface="Calibri" panose="020F0502020204030204" pitchFamily="34" charset="0"/>
+              </a:rPr>
+              <a:t>(allows limiting access to some service)</a:t>
+            </a:r>
+          </a:p>
+          <a:p>
+            <a:pPr marL="285750" indent="-285750">
+              <a:buFontTx/>
+              <a:buChar char="-"/>
+            </a:pPr>
+            <a:endParaRPr lang="en-US" sz="1600" dirty="0">
               <a:latin typeface="Calibri" panose="020F0502020204030204" pitchFamily="34" charset="0"/>
               <a:cs typeface="Calibri" panose="020F0502020204030204" pitchFamily="34" charset="0"/>
             </a:endParaRPr>
           </a:p>
           <a:p>
+            <a:pPr marL="285750" indent="-285750">
+              <a:buFontTx/>
+              <a:buChar char="-"/>
+            </a:pPr>
             <a:r>
-              <a:rPr lang="en-US" sz="1500" dirty="0">
+              <a:rPr lang="en-US" sz="1800" dirty="0">
                 <a:latin typeface="Calibri" panose="020F0502020204030204" pitchFamily="34" charset="0"/>
                 <a:cs typeface="Calibri" panose="020F0502020204030204" pitchFamily="34" charset="0"/>
               </a:rPr>
-              <a:t>- How do we know if a request is likely to fail? By Recording the results of several previous requests</a:t>
+              <a:t>Time Limiter </a:t>
+            </a:r>
+            <a:r>
+              <a:rPr lang="en-US" sz="1600" dirty="0">
+                <a:latin typeface="Calibri" panose="020F0502020204030204" pitchFamily="34" charset="0"/>
+                <a:cs typeface="Calibri" panose="020F0502020204030204" pitchFamily="34" charset="0"/>
+              </a:rPr>
+              <a:t>(limit the amount of time spent calling a remote service)</a:t>
+            </a:r>
+          </a:p>
+          <a:p>
+            <a:pPr marL="285750" indent="-285750">
+              <a:buFontTx/>
+              <a:buChar char="-"/>
+            </a:pPr>
+            <a:endParaRPr lang="en-US" sz="1800" dirty="0">
+              <a:latin typeface="Calibri" panose="020F0502020204030204" pitchFamily="34" charset="0"/>
+              <a:cs typeface="Calibri" panose="020F0502020204030204" pitchFamily="34" charset="0"/>
+            </a:endParaRPr>
+          </a:p>
+          <a:p>
+            <a:pPr marL="285750" indent="-285750">
+              <a:buFontTx/>
+              <a:buChar char="-"/>
+            </a:pPr>
+            <a:r>
+              <a:rPr lang="en-US" sz="1800" dirty="0">
+                <a:latin typeface="Calibri" panose="020F0502020204030204" pitchFamily="34" charset="0"/>
+                <a:cs typeface="Calibri" panose="020F0502020204030204" pitchFamily="34" charset="0"/>
+              </a:rPr>
+              <a:t>Bulkhead </a:t>
+            </a:r>
+            <a:r>
+              <a:rPr lang="en-US" sz="1600" dirty="0">
+                <a:latin typeface="Calibri" panose="020F0502020204030204" pitchFamily="34" charset="0"/>
+                <a:cs typeface="Calibri" panose="020F0502020204030204" pitchFamily="34" charset="0"/>
+              </a:rPr>
+              <a:t>(limit the number of concurrent calls to a particular service.)</a:t>
+            </a:r>
+            <a:endParaRPr lang="en-US" sz="1800" dirty="0">
+              <a:latin typeface="Calibri" panose="020F0502020204030204" pitchFamily="34" charset="0"/>
+              <a:cs typeface="Calibri" panose="020F0502020204030204" pitchFamily="34" charset="0"/>
+            </a:endParaRPr>
+          </a:p>
+          <a:p>
+            <a:pPr marL="285750" indent="-285750">
+              <a:buFontTx/>
+              <a:buChar char="-"/>
+            </a:pPr>
+            <a:endParaRPr lang="en-US" sz="1800" dirty="0">
+              <a:latin typeface="Calibri" panose="020F0502020204030204" pitchFamily="34" charset="0"/>
+              <a:cs typeface="Calibri" panose="020F0502020204030204" pitchFamily="34" charset="0"/>
+            </a:endParaRPr>
+          </a:p>
+          <a:p>
+            <a:pPr marL="285750" indent="-285750">
+              <a:buFontTx/>
+              <a:buChar char="-"/>
+            </a:pPr>
+            <a:endParaRPr lang="en-US" sz="1800" dirty="0">
+              <a:latin typeface="Calibri" panose="020F0502020204030204" pitchFamily="34" charset="0"/>
+              <a:cs typeface="Calibri" panose="020F0502020204030204" pitchFamily="34" charset="0"/>
+            </a:endParaRPr>
+          </a:p>
+          <a:p>
+            <a:pPr marL="285750" indent="-285750">
+              <a:buFontTx/>
+              <a:buChar char="-"/>
+            </a:pPr>
+            <a:r>
+              <a:rPr lang="en-US" sz="1800" dirty="0">
+                <a:latin typeface="Calibri" panose="020F0502020204030204" pitchFamily="34" charset="0"/>
+                <a:cs typeface="Calibri" panose="020F0502020204030204" pitchFamily="34" charset="0"/>
+                <a:hlinkClick r:id="rId2"/>
+              </a:rPr>
+              <a:t>https://resilience4j.readme.io/docs/getting-started</a:t>
+            </a:r>
+            <a:r>
+              <a:rPr lang="en-US" sz="1800" dirty="0">
+                <a:latin typeface="Calibri" panose="020F0502020204030204" pitchFamily="34" charset="0"/>
+                <a:cs typeface="Calibri" panose="020F0502020204030204" pitchFamily="34" charset="0"/>
+              </a:rPr>
+              <a:t> </a:t>
             </a:r>
           </a:p>
         </p:txBody>
       </p:sp>
-      <p:pic>
-        <p:nvPicPr>
-          <p:cNvPr id="2052" name="Picture 4">
-            <a:extLst>
-              <a:ext uri="{FF2B5EF4-FFF2-40B4-BE49-F238E27FC236}">
-                <a16:creationId xmlns:a16="http://schemas.microsoft.com/office/drawing/2014/main" id="{C11B862A-A7F7-413E-9384-C17B87E5E60C}"/>
-              </a:ext>
-            </a:extLst>
-          </p:cNvPr>
-          <p:cNvPicPr>
-            <a:picLocks noChangeAspect="1" noChangeArrowheads="1"/>
-          </p:cNvPicPr>
-          <p:nvPr/>
-        </p:nvPicPr>
-        <p:blipFill>
-          <a:blip r:embed="rId2">
-            <a:extLst>
-              <a:ext uri="{28A0092B-C50C-407E-A947-70E740481C1C}">
-                <a14:useLocalDpi xmlns:a14="http://schemas.microsoft.com/office/drawing/2010/main" val="0"/>
-              </a:ext>
-            </a:extLst>
-          </a:blip>
-          <a:srcRect/>
-          <a:stretch>
-            <a:fillRect/>
-          </a:stretch>
-        </p:blipFill>
-        <p:spPr bwMode="auto">
-          <a:xfrm>
-            <a:off x="5423606" y="1060551"/>
-            <a:ext cx="3363207" cy="3363207"/>
-          </a:xfrm>
-          <a:prstGeom prst="rect">
-            <a:avLst/>
-          </a:prstGeom>
-          <a:noFill/>
-          <a:extLst>
-            <a:ext uri="{909E8E84-426E-40DD-AFC4-6F175D3DCCD1}">
-              <a14:hiddenFill xmlns:a14="http://schemas.microsoft.com/office/drawing/2010/main">
-                <a:solidFill>
-                  <a:srgbClr val="FFFFFF"/>
-                </a:solidFill>
-              </a14:hiddenFill>
-            </a:ext>
-          </a:extLst>
-        </p:spPr>
-      </p:pic>
     </p:spTree>
     <p:extLst>
       <p:ext uri="{BB962C8B-B14F-4D97-AF65-F5344CB8AC3E}">
-        <p14:creationId xmlns:p14="http://schemas.microsoft.com/office/powerpoint/2010/main" val="2974039748"/>
+        <p14:creationId xmlns:p14="http://schemas.microsoft.com/office/powerpoint/2010/main" val="1417393991"/>
       </p:ext>
     </p:extLst>
   </p:cSld>
@@ -19729,9 +19972,10 @@
           <a:lstStyle/>
           <a:p>
             <a:r>
-              <a:rPr lang="en-US" dirty="0"/>
-              <a:t>Circuit Breaker State</a:t>
+              <a:rPr lang="en-US"/>
+              <a:t>What is Circuit Breaker?</a:t>
             </a:r>
+            <a:endParaRPr lang="en-US" dirty="0"/>
           </a:p>
         </p:txBody>
       </p:sp>
@@ -19775,8 +20019,8 @@
         </p:nvSpPr>
         <p:spPr>
           <a:xfrm>
-            <a:off x="497282" y="1088279"/>
-            <a:ext cx="4935329" cy="3785652"/>
+            <a:off x="489599" y="794766"/>
+            <a:ext cx="4873856" cy="3801041"/>
           </a:xfrm>
           <a:prstGeom prst="rect">
             <a:avLst/>
@@ -19791,77 +20035,81 @@
           <a:p>
             <a:r>
               <a:rPr lang="en-US" sz="1500" dirty="0"/>
-              <a:t>- </a:t>
-            </a:r>
-            <a:r>
-              <a:rPr lang="en-US" sz="1500" b="1" dirty="0"/>
-              <a:t>Closed</a:t>
-            </a:r>
-            <a:r>
-              <a:rPr lang="en-US" sz="1500" dirty="0"/>
-              <a:t>: when everything is normal. Initially, the circuit breaker is in a Closed state.</a:t>
-            </a:r>
-          </a:p>
-          <a:p>
-            <a:endParaRPr lang="en-US" sz="1500" dirty="0"/>
-          </a:p>
-          <a:p>
-            <a:r>
-              <a:rPr lang="en-US" sz="1500" dirty="0"/>
-              <a:t>- </a:t>
-            </a:r>
-            <a:r>
-              <a:rPr lang="en-US" sz="1500" b="1" dirty="0"/>
-              <a:t>Open</a:t>
-            </a:r>
-            <a:r>
-              <a:rPr lang="en-US" sz="1500" dirty="0"/>
-              <a:t>: when a failure occurs. In this state fail-fast or fallback will be performed if available</a:t>
-            </a:r>
-          </a:p>
-          <a:p>
-            <a:r>
-              <a:rPr lang="en-US" sz="1500" dirty="0"/>
-              <a:t>        When this state has passed a certain time limit will be moved to next state.</a:t>
-            </a:r>
-          </a:p>
-          <a:p>
-            <a:endParaRPr lang="en-US" sz="1500" dirty="0"/>
-          </a:p>
-          <a:p>
-            <a:r>
-              <a:rPr lang="en-US" sz="1500" dirty="0"/>
               <a:t>-</a:t>
             </a:r>
             <a:r>
-              <a:rPr lang="en-US" sz="1500" b="1" dirty="0"/>
-              <a:t> Half-Open</a:t>
+              <a:rPr lang="en-US" sz="1500" dirty="0">
+                <a:latin typeface="Calibri" panose="020F0502020204030204" pitchFamily="34" charset="0"/>
+                <a:cs typeface="Calibri" panose="020F0502020204030204" pitchFamily="34" charset="0"/>
+              </a:rPr>
+              <a:t> Original idea comes from electronic engineering where it comes in a form of automatic switch that designed to protected electrical circuit from damage by excess of current in the circuit.</a:t>
             </a:r>
+          </a:p>
+          <a:p>
+            <a:endParaRPr lang="en-US" sz="1500" dirty="0">
+              <a:latin typeface="Calibri" panose="020F0502020204030204" pitchFamily="34" charset="0"/>
+              <a:cs typeface="Calibri" panose="020F0502020204030204" pitchFamily="34" charset="0"/>
+            </a:endParaRPr>
+          </a:p>
+          <a:p>
             <a:r>
-              <a:rPr lang="en-US" sz="1500" dirty="0"/>
-              <a:t>: several requests will be executed to find out whether the microservices that we are calling are working normally.</a:t>
+              <a:rPr lang="en-US" sz="1500" dirty="0">
+                <a:latin typeface="Calibri" panose="020F0502020204030204" pitchFamily="34" charset="0"/>
+                <a:cs typeface="Calibri" panose="020F0502020204030204" pitchFamily="34" charset="0"/>
+              </a:rPr>
+              <a:t>- The concept of a circuit breaker is to prevent calls to microservice when it’s known the call may fail or time out.</a:t>
             </a:r>
           </a:p>
           <a:p>
+            <a:endParaRPr lang="en-US" sz="1600" dirty="0"/>
+          </a:p>
+          <a:p>
             <a:r>
-              <a:rPr lang="en-US" sz="1500" dirty="0"/>
-              <a:t>        If successful, the state will be returned to the Closed state. However, if it still fails it will be returned to the Open state.</a:t>
+              <a:rPr lang="en-US" sz="1500" dirty="0">
+                <a:latin typeface="Calibri" panose="020F0502020204030204" pitchFamily="34" charset="0"/>
+                <a:cs typeface="Calibri" panose="020F0502020204030204" pitchFamily="34" charset="0"/>
+              </a:rPr>
+              <a:t>- This is done so that clients don’t waste their valuable resources handling requests that are likely to fail. </a:t>
             </a:r>
           </a:p>
           <a:p>
-            <a:endParaRPr lang="en-US" sz="1500" dirty="0"/>
-          </a:p>
-          <a:p>
-            <a:endParaRPr lang="en-US" sz="1500" dirty="0"/>
+            <a:endParaRPr lang="en-US" sz="1500" dirty="0">
+              <a:latin typeface="Calibri" panose="020F0502020204030204" pitchFamily="34" charset="0"/>
+              <a:cs typeface="Calibri" panose="020F0502020204030204" pitchFamily="34" charset="0"/>
+            </a:endParaRPr>
+          </a:p>
+          <a:p>
+            <a:r>
+              <a:rPr lang="en-US" sz="1500" dirty="0">
+                <a:latin typeface="Calibri" panose="020F0502020204030204" pitchFamily="34" charset="0"/>
+                <a:cs typeface="Calibri" panose="020F0502020204030204" pitchFamily="34" charset="0"/>
+              </a:rPr>
+              <a:t>- Using this concept, we can give the server some spare time to recover.</a:t>
+            </a:r>
+          </a:p>
+          <a:p>
+            <a:endParaRPr lang="en-US" sz="1500" dirty="0">
+              <a:latin typeface="Calibri" panose="020F0502020204030204" pitchFamily="34" charset="0"/>
+              <a:cs typeface="Calibri" panose="020F0502020204030204" pitchFamily="34" charset="0"/>
+            </a:endParaRPr>
+          </a:p>
+          <a:p>
+            <a:r>
+              <a:rPr lang="en-US" sz="1500" dirty="0">
+                <a:latin typeface="Calibri" panose="020F0502020204030204" pitchFamily="34" charset="0"/>
+                <a:cs typeface="Calibri" panose="020F0502020204030204" pitchFamily="34" charset="0"/>
+              </a:rPr>
+              <a:t>- How do we know if a request is likely to fail? By Recording the results of several previous requests</a:t>
+            </a:r>
           </a:p>
         </p:txBody>
       </p:sp>
       <p:pic>
         <p:nvPicPr>
-          <p:cNvPr id="3074" name="Picture 2">
+          <p:cNvPr id="2052" name="Picture 4">
             <a:extLst>
               <a:ext uri="{FF2B5EF4-FFF2-40B4-BE49-F238E27FC236}">
-                <a16:creationId xmlns:a16="http://schemas.microsoft.com/office/drawing/2014/main" id="{32259E5E-E856-4EB0-A2B3-913A03590328}"/>
+                <a16:creationId xmlns:a16="http://schemas.microsoft.com/office/drawing/2014/main" id="{C11B862A-A7F7-413E-9384-C17B87E5E60C}"/>
               </a:ext>
             </a:extLst>
           </p:cNvPr>
@@ -19885,8 +20133,8 @@
         </p:blipFill>
         <p:spPr bwMode="auto">
           <a:xfrm>
-            <a:off x="5286614" y="756757"/>
-            <a:ext cx="3772862" cy="3761455"/>
+            <a:off x="5423606" y="1060551"/>
+            <a:ext cx="3363207" cy="3363207"/>
           </a:xfrm>
           <a:prstGeom prst="rect">
             <a:avLst/>
@@ -19906,7 +20154,7 @@
     </p:spTree>
     <p:extLst>
       <p:ext uri="{BB962C8B-B14F-4D97-AF65-F5344CB8AC3E}">
-        <p14:creationId xmlns:p14="http://schemas.microsoft.com/office/powerpoint/2010/main" val="1096642862"/>
+        <p14:creationId xmlns:p14="http://schemas.microsoft.com/office/powerpoint/2010/main" val="2974039748"/>
       </p:ext>
     </p:extLst>
   </p:cSld>
@@ -19962,7 +20210,7 @@
           <a:p>
             <a:r>
               <a:rPr lang="en-US" dirty="0"/>
-              <a:t>Circuit Breaker Type</a:t>
+              <a:t>Circuit Breaker State</a:t>
             </a:r>
           </a:p>
         </p:txBody>
@@ -20007,8 +20255,8 @@
         </p:nvSpPr>
         <p:spPr>
           <a:xfrm>
-            <a:off x="497283" y="949966"/>
-            <a:ext cx="8289530" cy="3093154"/>
+            <a:off x="497282" y="1088279"/>
+            <a:ext cx="4935329" cy="3785652"/>
           </a:xfrm>
           <a:prstGeom prst="rect">
             <a:avLst/>
@@ -20021,97 +20269,124 @@
           </a:bodyPr>
           <a:lstStyle/>
           <a:p>
-            <a:pPr marL="285750" indent="-285750">
-              <a:buFontTx/>
-              <a:buChar char="-"/>
-            </a:pPr>
+            <a:r>
+              <a:rPr lang="en-US" sz="1500" dirty="0"/>
+              <a:t>- </a:t>
+            </a:r>
             <a:r>
               <a:rPr lang="en-US" sz="1500" b="1" dirty="0"/>
-              <a:t>Count-based: </a:t>
+              <a:t>Closed</a:t>
             </a:r>
             <a:r>
               <a:rPr lang="en-US" sz="1500" dirty="0"/>
-              <a:t>the circuit breaker switches from a closed state to an open state when the last N requests have failed or timeout</a:t>
+              <a:t>: when everything is normal. Initially, the circuit breaker is in a Closed state.</a:t>
             </a:r>
           </a:p>
           <a:p>
-            <a:pPr marL="285750" indent="-285750">
-              <a:buFontTx/>
-              <a:buChar char="-"/>
-            </a:pPr>
             <a:endParaRPr lang="en-US" sz="1500" dirty="0"/>
           </a:p>
           <a:p>
-            <a:pPr marL="285750" indent="-285750">
-              <a:buFontTx/>
-              <a:buChar char="-"/>
-            </a:pPr>
+            <a:r>
+              <a:rPr lang="en-US" sz="1500" dirty="0"/>
+              <a:t>- </a:t>
+            </a:r>
             <a:r>
               <a:rPr lang="en-US" sz="1500" b="1" dirty="0"/>
-              <a:t>Time-based: </a:t>
+              <a:t>Open</a:t>
             </a:r>
             <a:r>
               <a:rPr lang="en-US" sz="1500" dirty="0"/>
-              <a:t>the circuit breaker switches from a closed state to an open state when the last N time unit has failed or timeout.</a:t>
+              <a:t>: when a failure occurs. In this state fail-fast or fallback will be performed if available</a:t>
             </a:r>
           </a:p>
           <a:p>
-            <a:pPr marL="285750" indent="-285750">
-              <a:buFontTx/>
-              <a:buChar char="-"/>
-            </a:pPr>
-            <a:endParaRPr lang="en-US" sz="1500" dirty="0"/>
-          </a:p>
-          <a:p>
-            <a:pPr marL="285750" indent="-285750">
-              <a:buFontTx/>
-              <a:buChar char="-"/>
-            </a:pPr>
             <a:r>
               <a:rPr lang="en-US" sz="1500" dirty="0"/>
-              <a:t>In both types of circuit breakers, we can determine what the threshold for failure or timeout is</a:t>
+              <a:t>        When this state has passed a certain time limit will be moved to next state.</a:t>
             </a:r>
           </a:p>
           <a:p>
-            <a:pPr marL="285750" indent="-285750">
-              <a:buFontTx/>
-              <a:buChar char="-"/>
-            </a:pPr>
             <a:endParaRPr lang="en-US" sz="1500" dirty="0"/>
           </a:p>
           <a:p>
-            <a:pPr marL="285750" indent="-285750">
-              <a:buFontTx/>
-              <a:buChar char="-"/>
-            </a:pPr>
             <a:r>
               <a:rPr lang="en-US" sz="1500" dirty="0"/>
-              <a:t>Suppose we specify that the circuit breaker will trip and go to the Open state when 50% of the last 20 requests took more than 2s</a:t>
+              <a:t>-</a:t>
             </a:r>
-          </a:p>
-          <a:p>
-            <a:pPr marL="285750" indent="-285750">
-              <a:buFontTx/>
-              <a:buChar char="-"/>
-            </a:pPr>
-            <a:endParaRPr lang="en-US" sz="1500" dirty="0"/>
-          </a:p>
-          <a:p>
-            <a:pPr marL="285750" indent="-285750">
-              <a:buFontTx/>
-              <a:buChar char="-"/>
-            </a:pPr>
+            <a:r>
+              <a:rPr lang="en-US" sz="1500" b="1" dirty="0"/>
+              <a:t> Half-Open</a:t>
+            </a:r>
             <a:r>
               <a:rPr lang="en-US" sz="1500" dirty="0"/>
-              <a:t>For a time-based, we can specify that 50% of the last 60 seconds of requests took more than 5s.</a:t>
+              <a:t>: several requests will be executed to find out whether the microservices that we are calling are working normally.</a:t>
             </a:r>
+          </a:p>
+          <a:p>
+            <a:r>
+              <a:rPr lang="en-US" sz="1500" dirty="0"/>
+              <a:t>        If successful, the state will be returned to the Closed state. However, if it still fails it will be returned to the Open state.</a:t>
+            </a:r>
+          </a:p>
+          <a:p>
+            <a:endParaRPr lang="en-US" sz="1500" dirty="0"/>
+          </a:p>
+          <a:p>
+            <a:endParaRPr lang="en-US" sz="1500" dirty="0"/>
           </a:p>
         </p:txBody>
       </p:sp>
+      <p:pic>
+        <p:nvPicPr>
+          <p:cNvPr id="3074" name="Picture 2">
+            <a:extLst>
+              <a:ext uri="{FF2B5EF4-FFF2-40B4-BE49-F238E27FC236}">
+                <a16:creationId xmlns:a16="http://schemas.microsoft.com/office/drawing/2014/main" id="{32259E5E-E856-4EB0-A2B3-913A03590328}"/>
+              </a:ext>
+            </a:extLst>
+          </p:cNvPr>
+          <p:cNvPicPr>
+            <a:picLocks noChangeAspect="1" noChangeArrowheads="1"/>
+          </p:cNvPicPr>
+          <p:nvPr/>
+        </p:nvPicPr>
+        <p:blipFill>
+          <a:blip r:embed="rId2">
+            <a:extLst>
+              <a:ext uri="{28A0092B-C50C-407E-A947-70E740481C1C}">
+                <a14:useLocalDpi xmlns:a14="http://schemas.microsoft.com/office/drawing/2010/main" val="0"/>
+              </a:ext>
+            </a:extLst>
+          </a:blip>
+          <a:srcRect/>
+          <a:stretch>
+            <a:fillRect/>
+          </a:stretch>
+        </p:blipFill>
+        <p:spPr bwMode="auto">
+          <a:xfrm>
+            <a:off x="5286614" y="756757"/>
+            <a:ext cx="3772862" cy="3761455"/>
+          </a:xfrm>
+          <a:prstGeom prst="rect">
+            <a:avLst/>
+          </a:prstGeom>
+          <a:noFill/>
+          <a:extLst>
+            <a:ext uri="{909E8E84-426E-40DD-AFC4-6F175D3DCCD1}">
+              <a14:hiddenFill xmlns:a14="http://schemas.microsoft.com/office/drawing/2010/main">
+                <a:solidFill>
+                  <a:srgbClr val="FFFFFF"/>
+                </a:solidFill>
+              </a14:hiddenFill>
+            </a:ext>
+          </a:extLst>
+        </p:spPr>
+      </p:pic>
     </p:spTree>
     <p:extLst>
       <p:ext uri="{BB962C8B-B14F-4D97-AF65-F5344CB8AC3E}">
-        <p14:creationId xmlns:p14="http://schemas.microsoft.com/office/powerpoint/2010/main" val="1122710094"/>
+        <p14:creationId xmlns:p14="http://schemas.microsoft.com/office/powerpoint/2010/main" val="1096642862"/>
       </p:ext>
     </p:extLst>
   </p:cSld>
@@ -20166,12 +20441,8 @@
           <a:lstStyle/>
           <a:p>
             <a:r>
-              <a:rPr lang="en-US"/>
-              <a:t>Resilience4j CB </a:t>
-            </a:r>
-            <a:r>
               <a:rPr lang="en-US" dirty="0"/>
-              <a:t>Implementation</a:t>
+              <a:t>Circuit Breaker Type</a:t>
             </a:r>
           </a:p>
         </p:txBody>
@@ -20217,7 +20488,7 @@
         <p:spPr>
           <a:xfrm>
             <a:off x="497283" y="949966"/>
-            <a:ext cx="7547900" cy="3477875"/>
+            <a:ext cx="8289530" cy="3093154"/>
           </a:xfrm>
           <a:prstGeom prst="rect">
             <a:avLst/>
@@ -20236,11 +20507,11 @@
             </a:pPr>
             <a:r>
               <a:rPr lang="en-US" sz="1500" b="1" dirty="0"/>
-              <a:t>Resilience4j</a:t>
+              <a:t>Count-based: </a:t>
             </a:r>
             <a:r>
               <a:rPr lang="en-US" sz="1500" dirty="0"/>
-              <a:t> is a lightweight fault tolerance library inspired by Netflix Hystrix but designed for functional programming.</a:t>
+              <a:t>the circuit breaker switches from a closed state to an open state when the last N requests have failed or timeout</a:t>
             </a:r>
           </a:p>
           <a:p>
@@ -20257,47 +20528,11 @@
             </a:pPr>
             <a:r>
               <a:rPr lang="en-US" sz="1500" b="1" dirty="0"/>
-              <a:t>Features</a:t>
+              <a:t>Time-based: </a:t>
             </a:r>
             <a:r>
               <a:rPr lang="en-US" sz="1500" dirty="0"/>
-              <a:t>:</a:t>
-            </a:r>
-          </a:p>
-          <a:p>
-            <a:r>
-              <a:rPr lang="en-US" dirty="0"/>
-              <a:t>        - Circuit Breaker (Fault Tolerance)</a:t>
-            </a:r>
-          </a:p>
-          <a:p>
-            <a:r>
-              <a:rPr lang="en-US" dirty="0"/>
-              <a:t>        - Rate Limiter (Block too frequent requests)</a:t>
-            </a:r>
-          </a:p>
-          <a:p>
-            <a:r>
-              <a:rPr lang="en-US" dirty="0"/>
-              <a:t>        - Time Limiter (Set time limit when calling remote operation)</a:t>
-            </a:r>
-          </a:p>
-          <a:p>
-            <a:r>
-              <a:rPr lang="en-US" dirty="0"/>
-              <a:t>        - Retry Mechanism (Automatically retry failed operation)</a:t>
-            </a:r>
-          </a:p>
-          <a:p>
-            <a:r>
-              <a:rPr lang="en-US" dirty="0"/>
-              <a:t>        - Bulkhead (Avoid too many concurrent requests)</a:t>
-            </a:r>
-          </a:p>
-          <a:p>
-            <a:r>
-              <a:rPr lang="en-US" sz="1500" dirty="0"/>
-              <a:t>       - Cache (Store results of costly remote operations)</a:t>
+              <a:t>the circuit breaker switches from a closed state to an open state when the last N time unit has failed or timeout.</a:t>
             </a:r>
           </a:p>
           <a:p>
@@ -20314,23 +20549,8 @@
             </a:pPr>
             <a:r>
               <a:rPr lang="en-US" sz="1500" dirty="0"/>
-              <a:t>Add Dependencies and </a:t>
+              <a:t>In both types of circuit breakers, we can determine what the threshold for failure or timeout is</a:t>
             </a:r>
-            <a:r>
-              <a:rPr lang="en-US" sz="1500" dirty="0" err="1"/>
-              <a:t>application.yml</a:t>
-            </a:r>
-            <a:r>
-              <a:rPr lang="en-US" sz="1500" dirty="0"/>
-              <a:t> file to define configurations.</a:t>
-            </a:r>
-          </a:p>
-          <a:p>
-            <a:pPr marL="285750" indent="-285750">
-              <a:buFontTx/>
-              <a:buChar char="-"/>
-            </a:pPr>
-            <a:endParaRPr lang="en-US" sz="1500" b="1" dirty="0"/>
           </a:p>
           <a:p>
             <a:pPr marL="285750" indent="-285750">
@@ -20344,14 +20564,34 @@
               <a:buFontTx/>
               <a:buChar char="-"/>
             </a:pPr>
+            <a:r>
+              <a:rPr lang="en-US" sz="1500" dirty="0"/>
+              <a:t>Suppose we specify that the circuit breaker will trip and go to the Open state when 50% of the last 20 requests took more than 2s</a:t>
+            </a:r>
+          </a:p>
+          <a:p>
+            <a:pPr marL="285750" indent="-285750">
+              <a:buFontTx/>
+              <a:buChar char="-"/>
+            </a:pPr>
             <a:endParaRPr lang="en-US" sz="1500" dirty="0"/>
+          </a:p>
+          <a:p>
+            <a:pPr marL="285750" indent="-285750">
+              <a:buFontTx/>
+              <a:buChar char="-"/>
+            </a:pPr>
+            <a:r>
+              <a:rPr lang="en-US" sz="1500" dirty="0"/>
+              <a:t>For a time-based, we can specify that 50% of the last 60 seconds of requests took more than 5s.</a:t>
+            </a:r>
           </a:p>
         </p:txBody>
       </p:sp>
     </p:spTree>
     <p:extLst>
       <p:ext uri="{BB962C8B-B14F-4D97-AF65-F5344CB8AC3E}">
-        <p14:creationId xmlns:p14="http://schemas.microsoft.com/office/powerpoint/2010/main" val="3753348737"/>
+        <p14:creationId xmlns:p14="http://schemas.microsoft.com/office/powerpoint/2010/main" val="1122710094"/>
       </p:ext>
     </p:extLst>
   </p:cSld>
@@ -20439,6 +20679,242 @@
             <a:fld id="{00000000-1234-1234-1234-123412341234}" type="slidenum">
               <a:rPr lang="en-US" smtClean="0"/>
               <a:t>8</a:t>
+            </a:fld>
+            <a:endParaRPr lang="en-US" dirty="0"/>
+          </a:p>
+        </p:txBody>
+      </p:sp>
+      <p:sp>
+        <p:nvSpPr>
+          <p:cNvPr id="6" name="TextBox 5"/>
+          <p:cNvSpPr txBox="1"/>
+          <p:nvPr/>
+        </p:nvSpPr>
+        <p:spPr>
+          <a:xfrm>
+            <a:off x="497283" y="949966"/>
+            <a:ext cx="7547900" cy="3477875"/>
+          </a:xfrm>
+          <a:prstGeom prst="rect">
+            <a:avLst/>
+          </a:prstGeom>
+          <a:noFill/>
+        </p:spPr>
+        <p:txBody>
+          <a:bodyPr wrap="square" rtlCol="0">
+            <a:spAutoFit/>
+          </a:bodyPr>
+          <a:lstStyle/>
+          <a:p>
+            <a:pPr marL="285750" indent="-285750">
+              <a:buFontTx/>
+              <a:buChar char="-"/>
+            </a:pPr>
+            <a:r>
+              <a:rPr lang="en-US" sz="1500" b="1" dirty="0"/>
+              <a:t>Resilience4j</a:t>
+            </a:r>
+            <a:r>
+              <a:rPr lang="en-US" sz="1500" dirty="0"/>
+              <a:t> is a lightweight fault tolerance library inspired by Netflix Hystrix but designed for functional programming.</a:t>
+            </a:r>
+          </a:p>
+          <a:p>
+            <a:pPr marL="285750" indent="-285750">
+              <a:buFontTx/>
+              <a:buChar char="-"/>
+            </a:pPr>
+            <a:endParaRPr lang="en-US" sz="1500" dirty="0"/>
+          </a:p>
+          <a:p>
+            <a:pPr marL="285750" indent="-285750">
+              <a:buFontTx/>
+              <a:buChar char="-"/>
+            </a:pPr>
+            <a:r>
+              <a:rPr lang="en-US" sz="1500" b="1" dirty="0"/>
+              <a:t>Features</a:t>
+            </a:r>
+            <a:r>
+              <a:rPr lang="en-US" sz="1500" dirty="0"/>
+              <a:t>:</a:t>
+            </a:r>
+          </a:p>
+          <a:p>
+            <a:r>
+              <a:rPr lang="en-US" dirty="0"/>
+              <a:t>        - Circuit Breaker (Fault Tolerance)</a:t>
+            </a:r>
+          </a:p>
+          <a:p>
+            <a:r>
+              <a:rPr lang="en-US" dirty="0"/>
+              <a:t>        - Rate Limiter (Block too frequent requests)</a:t>
+            </a:r>
+          </a:p>
+          <a:p>
+            <a:r>
+              <a:rPr lang="en-US" dirty="0"/>
+              <a:t>        - Time Limiter (Set time limit when calling remote operation)</a:t>
+            </a:r>
+          </a:p>
+          <a:p>
+            <a:r>
+              <a:rPr lang="en-US" dirty="0"/>
+              <a:t>        - Retry Mechanism (Automatically retry failed operation)</a:t>
+            </a:r>
+          </a:p>
+          <a:p>
+            <a:r>
+              <a:rPr lang="en-US" dirty="0"/>
+              <a:t>        - Bulkhead (Avoid too many concurrent requests)</a:t>
+            </a:r>
+          </a:p>
+          <a:p>
+            <a:r>
+              <a:rPr lang="en-US" sz="1500" dirty="0"/>
+              <a:t>       - Cache (Store results of costly remote operations)</a:t>
+            </a:r>
+          </a:p>
+          <a:p>
+            <a:pPr marL="285750" indent="-285750">
+              <a:buFontTx/>
+              <a:buChar char="-"/>
+            </a:pPr>
+            <a:endParaRPr lang="en-US" sz="1500" dirty="0"/>
+          </a:p>
+          <a:p>
+            <a:pPr marL="285750" indent="-285750">
+              <a:buFontTx/>
+              <a:buChar char="-"/>
+            </a:pPr>
+            <a:r>
+              <a:rPr lang="en-US" sz="1500" dirty="0"/>
+              <a:t>Add Required Dependencies and </a:t>
+            </a:r>
+            <a:r>
+              <a:rPr lang="en-US" sz="1500" dirty="0" err="1"/>
+              <a:t>application.yml</a:t>
+            </a:r>
+            <a:r>
+              <a:rPr lang="en-US" sz="1500" dirty="0"/>
+              <a:t> file to define configurations.</a:t>
+            </a:r>
+          </a:p>
+          <a:p>
+            <a:pPr marL="285750" indent="-285750">
+              <a:buFontTx/>
+              <a:buChar char="-"/>
+            </a:pPr>
+            <a:endParaRPr lang="en-US" sz="1500" b="1" dirty="0"/>
+          </a:p>
+          <a:p>
+            <a:pPr marL="285750" indent="-285750">
+              <a:buFontTx/>
+              <a:buChar char="-"/>
+            </a:pPr>
+            <a:endParaRPr lang="en-US" sz="1500" dirty="0"/>
+          </a:p>
+          <a:p>
+            <a:pPr marL="285750" indent="-285750">
+              <a:buFontTx/>
+              <a:buChar char="-"/>
+            </a:pPr>
+            <a:endParaRPr lang="en-US" sz="1500" dirty="0"/>
+          </a:p>
+        </p:txBody>
+      </p:sp>
+    </p:spTree>
+    <p:extLst>
+      <p:ext uri="{BB962C8B-B14F-4D97-AF65-F5344CB8AC3E}">
+        <p14:creationId xmlns:p14="http://schemas.microsoft.com/office/powerpoint/2010/main" val="3753348737"/>
+      </p:ext>
+    </p:extLst>
+  </p:cSld>
+  <p:clrMapOvr>
+    <a:masterClrMapping/>
+  </p:clrMapOvr>
+  <mc:AlternateContent xmlns:mc="http://schemas.openxmlformats.org/markup-compatibility/2006" xmlns:p14="http://schemas.microsoft.com/office/powerpoint/2010/main">
+    <mc:Choice Requires="p14">
+      <p:transition p14:dur="100">
+        <p:cut/>
+      </p:transition>
+    </mc:Choice>
+    <mc:Fallback xmlns="">
+      <p:transition>
+        <p:cut/>
+      </p:transition>
+    </mc:Fallback>
+  </mc:AlternateContent>
+</p:sld>
+</file>
+
+<file path=ppt/slides/slide9.xml><?xml version="1.0" encoding="utf-8"?>
+<p:sld xmlns:a="http://schemas.openxmlformats.org/drawingml/2006/main" xmlns:r="http://schemas.openxmlformats.org/officeDocument/2006/relationships" xmlns:p="http://schemas.openxmlformats.org/presentationml/2006/main">
+  <p:cSld>
+    <p:spTree>
+      <p:nvGrpSpPr>
+        <p:cNvPr id="1" name=""/>
+        <p:cNvGrpSpPr/>
+        <p:nvPr/>
+      </p:nvGrpSpPr>
+      <p:grpSpPr>
+        <a:xfrm>
+          <a:off x="0" y="0"/>
+          <a:ext cx="0" cy="0"/>
+          <a:chOff x="0" y="0"/>
+          <a:chExt cx="0" cy="0"/>
+        </a:xfrm>
+      </p:grpSpPr>
+      <p:sp>
+        <p:nvSpPr>
+          <p:cNvPr id="2" name="Title 1"/>
+          <p:cNvSpPr>
+            <a:spLocks noGrp="1"/>
+          </p:cNvSpPr>
+          <p:nvPr>
+            <p:ph type="title"/>
+          </p:nvPr>
+        </p:nvSpPr>
+        <p:spPr/>
+        <p:txBody>
+          <a:bodyPr/>
+          <a:lstStyle/>
+          <a:p>
+            <a:r>
+              <a:rPr lang="en-US" dirty="0"/>
+              <a:t>Resilience4j Circuit Breaker Conti..</a:t>
+            </a:r>
+          </a:p>
+        </p:txBody>
+      </p:sp>
+      <p:sp>
+        <p:nvSpPr>
+          <p:cNvPr id="3" name="Slide Number Placeholder 2"/>
+          <p:cNvSpPr>
+            <a:spLocks noGrp="1"/>
+          </p:cNvSpPr>
+          <p:nvPr>
+            <p:ph type="sldNum" idx="12"/>
+          </p:nvPr>
+        </p:nvSpPr>
+        <p:spPr/>
+        <p:txBody>
+          <a:bodyPr/>
+          <a:lstStyle/>
+          <a:p>
+            <a:pPr marL="0" lvl="0" indent="0">
+              <a:spcBef>
+                <a:spcPts val="0"/>
+              </a:spcBef>
+              <a:spcAft>
+                <a:spcPts val="0"/>
+              </a:spcAft>
+              <a:buNone/>
+            </a:pPr>
+            <a:fld id="{00000000-1234-1234-1234-123412341234}" type="slidenum">
+              <a:rPr lang="en-US" smtClean="0"/>
+              <a:t>9</a:t>
             </a:fld>
             <a:endParaRPr lang="en-US" dirty="0"/>
           </a:p>
@@ -20519,173 +20995,6 @@
     <p:extLst>
       <p:ext uri="{BB962C8B-B14F-4D97-AF65-F5344CB8AC3E}">
         <p14:creationId xmlns:p14="http://schemas.microsoft.com/office/powerpoint/2010/main" val="3932210154"/>
-      </p:ext>
-    </p:extLst>
-  </p:cSld>
-  <p:clrMapOvr>
-    <a:masterClrMapping/>
-  </p:clrMapOvr>
-  <mc:AlternateContent xmlns:mc="http://schemas.openxmlformats.org/markup-compatibility/2006" xmlns:p14="http://schemas.microsoft.com/office/powerpoint/2010/main">
-    <mc:Choice Requires="p14">
-      <p:transition p14:dur="100">
-        <p:cut/>
-      </p:transition>
-    </mc:Choice>
-    <mc:Fallback xmlns="">
-      <p:transition>
-        <p:cut/>
-      </p:transition>
-    </mc:Fallback>
-  </mc:AlternateContent>
-</p:sld>
-</file>
-
-<file path=ppt/slides/slide9.xml><?xml version="1.0" encoding="utf-8"?>
-<p:sld xmlns:a="http://schemas.openxmlformats.org/drawingml/2006/main" xmlns:r="http://schemas.openxmlformats.org/officeDocument/2006/relationships" xmlns:p="http://schemas.openxmlformats.org/presentationml/2006/main">
-  <p:cSld>
-    <p:spTree>
-      <p:nvGrpSpPr>
-        <p:cNvPr id="1" name=""/>
-        <p:cNvGrpSpPr/>
-        <p:nvPr/>
-      </p:nvGrpSpPr>
-      <p:grpSpPr>
-        <a:xfrm>
-          <a:off x="0" y="0"/>
-          <a:ext cx="0" cy="0"/>
-          <a:chOff x="0" y="0"/>
-          <a:chExt cx="0" cy="0"/>
-        </a:xfrm>
-      </p:grpSpPr>
-      <p:sp>
-        <p:nvSpPr>
-          <p:cNvPr id="2" name="Title 1"/>
-          <p:cNvSpPr>
-            <a:spLocks noGrp="1"/>
-          </p:cNvSpPr>
-          <p:nvPr>
-            <p:ph type="title"/>
-          </p:nvPr>
-        </p:nvSpPr>
-        <p:spPr/>
-        <p:txBody>
-          <a:bodyPr/>
-          <a:lstStyle/>
-          <a:p>
-            <a:r>
-              <a:rPr lang="en-US" dirty="0"/>
-              <a:t>Resilience4j Retry</a:t>
-            </a:r>
-          </a:p>
-        </p:txBody>
-      </p:sp>
-      <p:sp>
-        <p:nvSpPr>
-          <p:cNvPr id="3" name="Slide Number Placeholder 2"/>
-          <p:cNvSpPr>
-            <a:spLocks noGrp="1"/>
-          </p:cNvSpPr>
-          <p:nvPr>
-            <p:ph type="sldNum" idx="12"/>
-          </p:nvPr>
-        </p:nvSpPr>
-        <p:spPr/>
-        <p:txBody>
-          <a:bodyPr/>
-          <a:lstStyle/>
-          <a:p>
-            <a:pPr marL="0" lvl="0" indent="0">
-              <a:spcBef>
-                <a:spcPts val="0"/>
-              </a:spcBef>
-              <a:spcAft>
-                <a:spcPts val="0"/>
-              </a:spcAft>
-              <a:buNone/>
-            </a:pPr>
-            <a:fld id="{00000000-1234-1234-1234-123412341234}" type="slidenum">
-              <a:rPr lang="en-US" smtClean="0"/>
-              <a:t>9</a:t>
-            </a:fld>
-            <a:endParaRPr lang="en-US" dirty="0"/>
-          </a:p>
-        </p:txBody>
-      </p:sp>
-      <p:pic>
-        <p:nvPicPr>
-          <p:cNvPr id="6" name="Picture 5" descr="Diagram&#10;&#10;Description automatically generated">
-            <a:extLst>
-              <a:ext uri="{FF2B5EF4-FFF2-40B4-BE49-F238E27FC236}">
-                <a16:creationId xmlns:a16="http://schemas.microsoft.com/office/drawing/2014/main" id="{C80B5CC3-CFE0-46BE-8DF4-7F6BA49CADA5}"/>
-              </a:ext>
-            </a:extLst>
-          </p:cNvPr>
-          <p:cNvPicPr>
-            <a:picLocks noChangeAspect="1"/>
-          </p:cNvPicPr>
-          <p:nvPr/>
-        </p:nvPicPr>
-        <p:blipFill>
-          <a:blip r:embed="rId2"/>
-          <a:stretch>
-            <a:fillRect/>
-          </a:stretch>
-        </p:blipFill>
-        <p:spPr>
-          <a:xfrm>
-            <a:off x="614723" y="1081470"/>
-            <a:ext cx="5405838" cy="3194050"/>
-          </a:xfrm>
-          <a:prstGeom prst="rect">
-            <a:avLst/>
-          </a:prstGeom>
-        </p:spPr>
-      </p:pic>
-      <p:sp>
-        <p:nvSpPr>
-          <p:cNvPr id="4" name="TextBox 3">
-            <a:extLst>
-              <a:ext uri="{FF2B5EF4-FFF2-40B4-BE49-F238E27FC236}">
-                <a16:creationId xmlns:a16="http://schemas.microsoft.com/office/drawing/2014/main" id="{17E8954E-A1DB-47DE-9CB5-919890DCBA3F}"/>
-              </a:ext>
-            </a:extLst>
-          </p:cNvPr>
-          <p:cNvSpPr txBox="1"/>
-          <p:nvPr/>
-        </p:nvSpPr>
-        <p:spPr>
-          <a:xfrm>
-            <a:off x="6439220" y="1467650"/>
-            <a:ext cx="2574151" cy="523220"/>
-          </a:xfrm>
-          <a:prstGeom prst="rect">
-            <a:avLst/>
-          </a:prstGeom>
-          <a:noFill/>
-        </p:spPr>
-        <p:txBody>
-          <a:bodyPr wrap="square" rtlCol="0">
-            <a:spAutoFit/>
-          </a:bodyPr>
-          <a:lstStyle/>
-          <a:p>
-            <a:r>
-              <a:rPr lang="en-US" dirty="0">
-                <a:hlinkClick r:id="rId3"/>
-              </a:rPr>
-              <a:t>https://resilience4j.readme.io/docs/retry</a:t>
-            </a:r>
-            <a:r>
-              <a:rPr lang="en-US" dirty="0"/>
-              <a:t> </a:t>
-            </a:r>
-          </a:p>
-        </p:txBody>
-      </p:sp>
-    </p:spTree>
-    <p:extLst>
-      <p:ext uri="{BB962C8B-B14F-4D97-AF65-F5344CB8AC3E}">
-        <p14:creationId xmlns:p14="http://schemas.microsoft.com/office/powerpoint/2010/main" val="202709181"/>
       </p:ext>
     </p:extLst>
   </p:cSld>
